--- a/JAL_Accountable_Equity_Proposal.pptx
+++ b/JAL_Accountable_Equity_Proposal.pptx
@@ -515,7 +515,7 @@
           <a:p>
             <a:r>
               <a:rPr lang="en-US" dirty="0"/>
-              <a:t>Cover. This is the discussion document Bob asked me to put together on our 6/5 call. Frame: JAL as development + capital partner for Accountable Equity's land bank.</a:t>
+              <a:t>Cover. The discussion document Bob asked for on our 6/5 call — scoped to the land bank around the golf courses: entitle, sell lots to builders, recycle. Capital-light, JAL-led.</a:t>
             </a:r>
             <a:endParaRPr lang="en-US" dirty="0"/>
           </a:p>
@@ -603,7 +603,7 @@
           <a:p>
             <a:r>
               <a:rPr lang="en-US" dirty="0"/>
-              <a:t>Bob said he's setting up a development company. Proposal: formalize it as a JV vehicle. AE contributes land = equity; JAL co-invests + runs capital formation. Skin in the game throughout.</a:t>
+              <a:t>Formalize Bob's dev co as a land JV. AE contributes course-adjacent land = equity; JAL co-invests and runs entitlement + capital + lot sales. Builders fund the horizontal.</a:t>
             </a:r>
             <a:endParaRPr lang="en-US" dirty="0"/>
           </a:p>
@@ -691,7 +691,7 @@
           <a:p>
             <a:r>
               <a:rPr lang="en-US" dirty="0"/>
-              <a:t>Directly answers Bob's question on comp. He said his preference is skin in the game; I agreed and proposed a hybrid. Retainer is modest and creditable — emphasize the carry/co-invest as the real alignment. All numbers are opening positions for discussion.</a:t>
+              <a:t>Directly answers Bob's comp question. He said his preference is skin in the game; I agree and propose a hybrid — modest, creditable retainer + carry on lot-sale value. All numbers are opening positions.</a:t>
             </a:r>
             <a:endParaRPr lang="en-US" dirty="0"/>
           </a:p>
@@ -779,7 +779,7 @@
           <a:p>
             <a:r>
               <a:rPr lang="en-US" dirty="0"/>
-              <a:t>Bob's email literally said 'review your resume.' This is it. Capital-markets pedigree (Blackstone), operator/development (Levcor, JAL-JCP), Wharton, ULI leadership.</a:t>
+              <a:t>Bob's email said 'review your resume.' This is it. Capital-markets pedigree (Blackstone), operator/development (Levcor, JAL-JCP), Wharton, ULI leadership.</a:t>
             </a:r>
             <a:endParaRPr lang="en-US" dirty="0"/>
           </a:p>
@@ -1043,7 +1043,7 @@
           <a:p>
             <a:r>
               <a:rPr lang="en-US" dirty="0"/>
-              <a:t>Open by mirroring Bob's framing back to him: lots of owned land, strong hospitality operator, real town relationships, hotels turning away business. The constraint is capital + bandwidth.</a:t>
+              <a:t>Frame the land bank as the first move: owned land, builder-funded infrastructure, golf premium, town tailwinds. Capital-light and fast — exactly the play Bob leaned toward on the call.</a:t>
             </a:r>
             <a:endParaRPr lang="en-US" dirty="0"/>
           </a:p>
@@ -1131,7 +1131,7 @@
           <a:p>
             <a:r>
               <a:rPr lang="en-US" dirty="0"/>
-              <a:t>Walk the portfolio. Emphasize that these are owned assets with distinct paths. Queenstown is the flagship; commercial base (Lockheed etc.) underwrites credit.</a:t>
+              <a:t>Keep it golf-only. Queenstown is the anchor (700 ac, 3 courses near D.C.); LBI National is the shore-scarcity play; the recently-acquired course is pipeline. Same template each time.</a:t>
             </a:r>
             <a:endParaRPr lang="en-US" dirty="0"/>
           </a:p>
@@ -1219,7 +1219,7 @@
           <a:p>
             <a:r>
               <a:rPr lang="en-US" dirty="0"/>
-              <a:t>The sequencing is the pitch: start capital-light (entitle + lot sales), then recycle into keys and destination build. Aligns with Bob saying they may only need soft costs to start.</a:t>
+              <a:t>The sequencing IS the pitch: entitle (soft costs) → sell to builders (they fund infra) → golf premium → recycle. Matches Bob's 'let the developer handle the infrastructure.'</a:t>
             </a:r>
             <a:endParaRPr lang="en-US" dirty="0"/>
           </a:p>
@@ -1307,7 +1307,7 @@
           <a:p>
             <a:r>
               <a:rPr lang="en-US" dirty="0"/>
-              <a:t>Queenstown is the wedge. 700 owned acres, established golf, close to D.C. Lead with entitlement + lot sales (capital-light), keys second. The corporate-buyout note is the Palantir week Bob mentioned — kept generic on purpose.</a:t>
+              <a:t>Queenstown is the wedge: 700 owned acres, established golf, an hour from D.C. Lead with entitlement + lot sales. The corporate-buyout note is the Palantir week Bob mentioned — kept generic; name it if Bob's comfortable.</a:t>
             </a:r>
             <a:endParaRPr lang="en-US" dirty="0"/>
           </a:p>
@@ -1395,7 +1395,7 @@
           <a:p>
             <a:r>
               <a:rPr lang="en-US" dirty="0"/>
-              <a:t>Be explicit that these are illustrative placeholders. The point is the method: developable acres × lot yield × price, net of land-dev cost. Swap in real survey/absorption data.</a:t>
+              <a:t>Be explicit these are illustrative placeholders. The method: developable acres × lot yield × price, net of land-dev cost. Swap in real survey / absorption data. Builders typically fund the horizontal.</a:t>
             </a:r>
             <a:endParaRPr lang="en-US" dirty="0"/>
           </a:p>
@@ -1483,7 +1483,7 @@
           <a:p>
             <a:r>
               <a:rPr lang="en-US" dirty="0"/>
-              <a:t>This directly answers Bob's 'sending business off and not making a dime.' Modest 120-key add converts existing overflow into ~$2.6M NOI / ~$32M value. Illustrative.</a:t>
+              <a:t>Mirrors the reference's competitive-supply slide. Point: golf frontage + metro demand + builder appetite + owned-land basis = lots that sell. Land development is a good business when the strategy is right.</a:t>
             </a:r>
             <a:endParaRPr lang="en-US" dirty="0"/>
           </a:p>
@@ -1571,7 +1571,7 @@
           <a:p>
             <a:r>
               <a:rPr lang="en-US" dirty="0"/>
-              <a:t>Answers Bob's 'equity or debt — either.' Position: debt-led, land-as-equity. Emphasize the modest, staged cash ask — de-risks the conversation.</a:t>
+              <a:t>Reframed from the $100M hospitality line. For the land bank, the honest story is capital-light: soft costs in, builders fund infra and buy lots. Bob said as much — they may only need soft costs.</a:t>
             </a:r>
             <a:endParaRPr lang="en-US" dirty="0"/>
           </a:p>
@@ -1659,7 +1659,7 @@
           <a:p>
             <a:r>
               <a:rPr lang="en-US" dirty="0"/>
-              <a:t>Credibility slide. Lead with the live Houston deal ($14M equity / $19.5M debt) as proof I actually close. Then the network: TX family offices, Angelo Gordon, Goldman, hospitality credit.</a:t>
+              <a:t>Bob's inbound was literally about capital access. Lead with the live Houston deal ($14M / $19.5M) as proof I close, then the network. Even capital-light, this is why I'm useful.</a:t>
             </a:r>
             <a:endParaRPr lang="en-US" dirty="0"/>
           </a:p>
@@ -2261,7 +2261,7 @@
                 <a:ea typeface="Montserrat" pitchFamily="34" charset="-122"/>
                 <a:cs typeface="Montserrat" pitchFamily="34" charset="-120"/>
               </a:rPr>
-              <a:t>Land Development &amp; Capital Partnership</a:t>
+              <a:t>Golf-Course Land Development Partnership</a:t>
             </a:r>
             <a:endParaRPr lang="en-US" sz="2200" dirty="0"/>
           </a:p>
@@ -2300,7 +2300,7 @@
                 <a:ea typeface="DM Sans" pitchFamily="34" charset="-122"/>
                 <a:cs typeface="DM Sans" pitchFamily="34" charset="-120"/>
               </a:rPr>
-              <a:t>A proposal for JAL Strategies as development &amp; capital partner</a:t>
+              <a:t>Entitling and selling the residential land around the courses you already own</a:t>
             </a:r>
             <a:endParaRPr lang="en-US" sz="1400" dirty="0"/>
           </a:p>
@@ -2339,7 +2339,7 @@
                 <a:ea typeface="DM Sans" pitchFamily="34" charset="-122"/>
                 <a:cs typeface="DM Sans" pitchFamily="34" charset="-120"/>
               </a:rPr>
-              <a:t>Queenstown Harbor  ·  Kent Island  ·  LBI National  ·  Bohemia Manor  ·  1,000+ acres</a:t>
+              <a:t>Queenstown Harbor  ·  LBI National  ·  700+ acres of golf-frontage land</a:t>
             </a:r>
             <a:endParaRPr lang="en-US" sz="1200" dirty="0"/>
           </a:p>
@@ -2785,7 +2785,7 @@
                 <a:ea typeface="DM Sans" pitchFamily="34" charset="-122"/>
                 <a:cs typeface="DM Sans" pitchFamily="34" charset="-120"/>
               </a:rPr>
-              <a:t>Formalize the development entity you're already standing up. Accountable Equity contributes land; the vehicle raises debt + equity; JAL co-invests and runs capital formation alongside your team.</a:t>
+              <a:t>Formalize the development entity you're standing up — scoped to the course-adjacent land. Accountable Equity contributes the acreage as equity; JAL co-invests and runs entitlement, capital and lot sales alongside your team.</a:t>
             </a:r>
             <a:endParaRPr lang="en-US" sz="1300" dirty="0"/>
           </a:p>
@@ -2864,7 +2864,7 @@
                 <a:ea typeface="Montserrat" pitchFamily="34" charset="-122"/>
                 <a:cs typeface="Montserrat" pitchFamily="34" charset="-120"/>
               </a:rPr>
-              <a:t>ACCOUNTABLE DEVELOPMENT PARTNERS, LLC</a:t>
+              <a:t>ACCOUNTABLE LAND PARTNERS, LLC</a:t>
             </a:r>
             <a:endParaRPr lang="en-US" sz="1700" dirty="0"/>
           </a:p>
@@ -2942,7 +2942,7 @@
                 <a:ea typeface="DM Sans" pitchFamily="34" charset="-122"/>
                 <a:cs typeface="DM Sans" pitchFamily="34" charset="-120"/>
               </a:rPr>
-              <a:t>Development vehicle formed with Accountable Equity</a:t>
+              <a:t>Land-development vehicle for the golf-course acreage</a:t>
             </a:r>
             <a:endParaRPr lang="en-US" sz="1000" dirty="0"/>
           </a:p>
@@ -3087,7 +3087,7 @@
                 <a:ea typeface="DM Sans" pitchFamily="34" charset="-122"/>
                 <a:cs typeface="DM Sans" pitchFamily="34" charset="-120"/>
               </a:rPr>
-              <a:t>Acreage contributed at appraised value forms the equity base — the hardest, most expensive input is already on the balance sheet.</a:t>
+              <a:t>Course-adjacent acreage contributed at appraised value forms the equity base — already owned, no acquisition cost.</a:t>
             </a:r>
             <a:endParaRPr lang="en-US" sz="1050" dirty="0"/>
           </a:p>
@@ -3327,7 +3327,7 @@
                 <a:ea typeface="DM Sans" pitchFamily="34" charset="-122"/>
                 <a:cs typeface="DM Sans" pitchFamily="34" charset="-120"/>
               </a:rPr>
-              <a:t>Construction / acq. debt</a:t>
+              <a:t>Builder-funded infra</a:t>
             </a:r>
             <a:endParaRPr lang="en-US" sz="1000" dirty="0"/>
           </a:p>
@@ -3366,7 +3366,7 @@
                 <a:ea typeface="Montserrat" pitchFamily="34" charset="-122"/>
                 <a:cs typeface="Montserrat" pitchFamily="34" charset="-120"/>
               </a:rPr>
-              <a:t>Senior</a:t>
+              <a:t>Horizontal</a:t>
             </a:r>
             <a:endParaRPr lang="en-US" sz="950" dirty="0"/>
           </a:p>
@@ -3464,7 +3464,7 @@
                 <a:ea typeface="Montserrat" pitchFamily="34" charset="-122"/>
                 <a:cs typeface="Montserrat" pitchFamily="34" charset="-120"/>
               </a:rPr>
-              <a:t>Co-invest</a:t>
+              <a:t>Soft costs</a:t>
             </a:r>
             <a:endParaRPr lang="en-US" sz="950" dirty="0"/>
           </a:p>
@@ -3617,19 +3617,22 @@
         <p:spPr>
           <a:xfrm>
             <a:off x="8220456" y="3557016"/>
-            <a:ext cx="3136392" cy="274320"/>
-          </a:xfrm>
-          <a:prstGeom prst="rect">
-            <a:avLst/>
-          </a:prstGeom>
-          <a:noFill/>
-          <a:ln/>
-        </p:spPr>
-        <p:txBody>
-          <a:bodyPr wrap="square" lIns="0" tIns="0" rIns="0" bIns="0" rtlCol="0" anchor="ctr"/>
-          <a:lstStyle/>
-          <a:p>
-            <a:pPr algn="l" indent="0" marL="0">
+            <a:ext cx="3136392" cy="310896"/>
+          </a:xfrm>
+          <a:prstGeom prst="rect">
+            <a:avLst/>
+          </a:prstGeom>
+          <a:noFill/>
+          <a:ln/>
+        </p:spPr>
+        <p:txBody>
+          <a:bodyPr wrap="square" lIns="0" tIns="0" rIns="0" bIns="0" rtlCol="0" anchor="ctr"/>
+          <a:lstStyle/>
+          <a:p>
+            <a:pPr algn="l" indent="0" marL="0">
+              <a:lnSpc>
+                <a:spcPts val="1100"/>
+              </a:lnSpc>
               <a:buNone/>
             </a:pPr>
             <a:r>
@@ -3641,7 +3644,7 @@
                 <a:ea typeface="DM Sans" pitchFamily="34" charset="-122"/>
                 <a:cs typeface="DM Sans" pitchFamily="34" charset="-120"/>
               </a:rPr>
-              <a:t>Owner &amp; hospitality operator</a:t>
+              <a:t>Land owner</a:t>
             </a:r>
             <a:endParaRPr lang="en-US" sz="950" dirty="0"/>
           </a:p>
@@ -3695,19 +3698,22 @@
         <p:spPr>
           <a:xfrm>
             <a:off x="8220456" y="4215384"/>
-            <a:ext cx="3136392" cy="274320"/>
-          </a:xfrm>
-          <a:prstGeom prst="rect">
-            <a:avLst/>
-          </a:prstGeom>
-          <a:noFill/>
-          <a:ln/>
-        </p:spPr>
-        <p:txBody>
-          <a:bodyPr wrap="square" lIns="0" tIns="0" rIns="0" bIns="0" rtlCol="0" anchor="ctr"/>
-          <a:lstStyle/>
-          <a:p>
-            <a:pPr algn="l" indent="0" marL="0">
+            <a:ext cx="3136392" cy="310896"/>
+          </a:xfrm>
+          <a:prstGeom prst="rect">
+            <a:avLst/>
+          </a:prstGeom>
+          <a:noFill/>
+          <a:ln/>
+        </p:spPr>
+        <p:txBody>
+          <a:bodyPr wrap="square" lIns="0" tIns="0" rIns="0" bIns="0" rtlCol="0" anchor="ctr"/>
+          <a:lstStyle/>
+          <a:p>
+            <a:pPr algn="l" indent="0" marL="0">
+              <a:lnSpc>
+                <a:spcPts val="1100"/>
+              </a:lnSpc>
               <a:buNone/>
             </a:pPr>
             <a:r>
@@ -3773,19 +3779,22 @@
         <p:spPr>
           <a:xfrm>
             <a:off x="8220456" y="4873752"/>
-            <a:ext cx="3136392" cy="274320"/>
-          </a:xfrm>
-          <a:prstGeom prst="rect">
-            <a:avLst/>
-          </a:prstGeom>
-          <a:noFill/>
-          <a:ln/>
-        </p:spPr>
-        <p:txBody>
-          <a:bodyPr wrap="square" lIns="0" tIns="0" rIns="0" bIns="0" rtlCol="0" anchor="ctr"/>
-          <a:lstStyle/>
-          <a:p>
-            <a:pPr algn="l" indent="0" marL="0">
+            <a:ext cx="3136392" cy="310896"/>
+          </a:xfrm>
+          <a:prstGeom prst="rect">
+            <a:avLst/>
+          </a:prstGeom>
+          <a:noFill/>
+          <a:ln/>
+        </p:spPr>
+        <p:txBody>
+          <a:bodyPr wrap="square" lIns="0" tIns="0" rIns="0" bIns="0" rtlCol="0" anchor="ctr"/>
+          <a:lstStyle/>
+          <a:p>
+            <a:pPr algn="l" indent="0" marL="0">
+              <a:lnSpc>
+                <a:spcPts val="1100"/>
+              </a:lnSpc>
               <a:buNone/>
             </a:pPr>
             <a:r>
@@ -3797,7 +3806,7 @@
                 <a:ea typeface="DM Sans" pitchFamily="34" charset="-122"/>
                 <a:cs typeface="DM Sans" pitchFamily="34" charset="-120"/>
               </a:rPr>
-              <a:t>Capital + execution — co-invests</a:t>
+              <a:t>Capital, entitlement &amp; sales — co-invests</a:t>
             </a:r>
             <a:endParaRPr lang="en-US" sz="950" dirty="0"/>
           </a:p>
@@ -4204,7 +4213,7 @@
                 <a:ea typeface="DM Sans" pitchFamily="34" charset="-122"/>
                 <a:cs typeface="DM Sans" pitchFamily="34" charset="-120"/>
               </a:rPr>
-              <a:t>You asked how I'd like to be comped. My preference matches yours — a small base to fund the work, then real alignment on what we create together. For discussion only.</a:t>
+              <a:t>You asked how I'd like to be comped. My preference matches yours — a small base to fund the work, then real alignment on the value we create. For discussion only.</a:t>
             </a:r>
             <a:endParaRPr lang="en-US" sz="1300" dirty="0"/>
           </a:p>
@@ -4361,7 +4370,7 @@
                 <a:ea typeface="DM Sans" pitchFamily="34" charset="-122"/>
                 <a:cs typeface="DM Sans" pitchFamily="34" charset="-120"/>
               </a:rPr>
-              <a:t>Aligned to capital placed and value created — not a flat consulting check.</a:t>
+              <a:t>Aligned to lot-sale value created — not a flat consulting check.</a:t>
             </a:r>
             <a:endParaRPr lang="en-US" sz="1000" dirty="0"/>
           </a:p>
@@ -4780,7 +4789,7 @@
                 <a:ea typeface="DM Sans" pitchFamily="34" charset="-122"/>
                 <a:cs typeface="DM Sans" pitchFamily="34" charset="-120"/>
               </a:rPr>
-              <a:t>Funds analysis, entitlement strategy &amp; capital sourcing during an initial term (creditable against success fees)</a:t>
+              <a:t>Funds entitlement strategy, underwriting &amp; capital sourcing during an initial term (creditable against success fees)</a:t>
             </a:r>
             <a:endParaRPr lang="en-US" sz="950" dirty="0"/>
           </a:p>
@@ -4960,7 +4969,7 @@
                 <a:ea typeface="DM Sans" pitchFamily="34" charset="-122"/>
                 <a:cs typeface="DM Sans" pitchFamily="34" charset="-120"/>
               </a:rPr>
-              <a:t>Standard success fee on capital actually placed — debt and equity</a:t>
+              <a:t>Success fee if and when we place debt or equity for a parcel</a:t>
             </a:r>
             <a:endParaRPr lang="en-US" sz="950" dirty="0"/>
           </a:p>
@@ -5140,7 +5149,7 @@
                 <a:ea typeface="DM Sans" pitchFamily="34" charset="-122"/>
                 <a:cs typeface="DM Sans" pitchFamily="34" charset="-120"/>
               </a:rPr>
-              <a:t>Meaningful share of value created; JAL co-invests its own capital alongside the deal</a:t>
+              <a:t>Share of value created on lot sales; JAL co-invests its own capital alongside</a:t>
             </a:r>
             <a:endParaRPr lang="en-US" sz="950" dirty="0"/>
           </a:p>
@@ -6886,7 +6895,7 @@
                 <a:ea typeface="DM Sans" pitchFamily="34" charset="-122"/>
                 <a:cs typeface="DM Sans" pitchFamily="34" charset="-120"/>
               </a:rPr>
-              <a:t>Light and fast to start — diligence now, an in-person while I'm in the Northeast in July, then a defined engagement.</a:t>
+              <a:t>Light and fast to start — diligence now, an in-person while I'm in the Northeast in July, then a defined engagement on the first parcel.</a:t>
             </a:r>
             <a:endParaRPr lang="en-US" sz="1300" dirty="0"/>
           </a:p>
@@ -7149,7 +7158,7 @@
                 <a:ea typeface="DM Sans" pitchFamily="34" charset="-122"/>
                 <a:cs typeface="DM Sans" pitchFamily="34" charset="-120"/>
               </a:rPr>
-              <a:t>Review AE sites (web, maps &amp; visits)</a:t>
+              <a:t>Review the courses (web, maps &amp; visits)</a:t>
             </a:r>
             <a:endParaRPr lang="en-US" sz="1000" dirty="0"/>
           </a:p>
@@ -7230,7 +7239,7 @@
                 <a:ea typeface="DM Sans" pitchFamily="34" charset="-122"/>
                 <a:cs typeface="DM Sans" pitchFamily="34" charset="-120"/>
               </a:rPr>
-              <a:t>You send project data (entitlements, occupancy / turn-away, capital stack)</a:t>
+              <a:t>You send parcel data (survey, entitlement status, zoning, encumbrances)</a:t>
             </a:r>
             <a:endParaRPr lang="en-US" sz="1000" dirty="0"/>
           </a:p>
@@ -7311,7 +7320,7 @@
                 <a:ea typeface="DM Sans" pitchFamily="34" charset="-122"/>
                 <a:cs typeface="DM Sans" pitchFamily="34" charset="-120"/>
               </a:rPr>
-              <a:t>JAL refines the monetization model per parcel</a:t>
+              <a:t>JAL refines the lot-monetization model per course</a:t>
             </a:r>
             <a:endParaRPr lang="en-US" sz="1000" dirty="0"/>
           </a:p>
@@ -7736,7 +7745,7 @@
                 <a:ea typeface="DM Sans" pitchFamily="34" charset="-122"/>
                 <a:cs typeface="DM Sans" pitchFamily="34" charset="-120"/>
               </a:rPr>
-              <a:t>Walk the priority sites (Queenstown / winery HQ)</a:t>
+              <a:t>Walk the priority parcels (Queenstown / LBI)</a:t>
             </a:r>
             <a:endParaRPr lang="en-US" sz="1000" dirty="0"/>
           </a:p>
@@ -7817,7 +7826,7 @@
                 <a:ea typeface="DM Sans" pitchFamily="34" charset="-122"/>
                 <a:cs typeface="DM Sans" pitchFamily="34" charset="-120"/>
               </a:rPr>
-              <a:t>Align on first parcel, capital plan &amp; comp</a:t>
+              <a:t>Align on first course, capital plan &amp; comp</a:t>
             </a:r>
             <a:endParaRPr lang="en-US" sz="1000" dirty="0"/>
           </a:p>
@@ -8161,7 +8170,7 @@
                 <a:ea typeface="DM Sans" pitchFamily="34" charset="-122"/>
                 <a:cs typeface="DM Sans" pitchFamily="34" charset="-120"/>
               </a:rPr>
-              <a:t>Stand up the development vehicle</a:t>
+              <a:t>Stand up the land-development vehicle</a:t>
             </a:r>
             <a:endParaRPr lang="en-US" sz="1000" dirty="0"/>
           </a:p>
@@ -8242,7 +8251,7 @@
                 <a:ea typeface="DM Sans" pitchFamily="34" charset="-122"/>
                 <a:cs typeface="DM Sans" pitchFamily="34" charset="-120"/>
               </a:rPr>
-              <a:t>Launch Phase 1 entitlements + soft-cost raise</a:t>
+              <a:t>Launch Phase 1 entitlements + soft-cost budget</a:t>
             </a:r>
             <a:endParaRPr lang="en-US" sz="1000" dirty="0"/>
           </a:p>
@@ -8323,7 +8332,7 @@
                 <a:ea typeface="DM Sans" pitchFamily="34" charset="-122"/>
                 <a:cs typeface="DM Sans" pitchFamily="34" charset="-120"/>
               </a:rPr>
-              <a:t>Begin capital sourcing (debt + equity)</a:t>
+              <a:t>Open regional-homebuilder conversations</a:t>
             </a:r>
             <a:endParaRPr lang="en-US" sz="1000" dirty="0"/>
           </a:p>
@@ -8404,7 +8413,7 @@
                 <a:ea typeface="DM Sans" pitchFamily="34" charset="-122"/>
                 <a:cs typeface="DM Sans" pitchFamily="34" charset="-120"/>
               </a:rPr>
-              <a:t>First lot sales / key-expansion underwriting</a:t>
+              <a:t>First entitled-lot sales underwritten</a:t>
             </a:r>
             <a:endParaRPr lang="en-US" sz="1000" dirty="0"/>
           </a:p>
@@ -8463,7 +8472,7 @@
                 <a:ea typeface="DM Sans" pitchFamily="34" charset="-122"/>
                 <a:cs typeface="DM Sans" pitchFamily="34" charset="-120"/>
               </a:rPr>
-              <a:t>What I need to sharpen the model: entitlement status per parcel · occupancy &amp; turn-away data · existing debt · the $100M use-of-funds · target timeline.</a:t>
+              <a:t>What I need to sharpen the model: survey / plat &amp; acreage · entitlement &amp; zoning status · any debt on the land · target timeline.</a:t>
             </a:r>
             <a:endParaRPr lang="en-US" sz="1100" dirty="0"/>
           </a:p>
@@ -8730,7 +8739,7 @@
                 <a:ea typeface="DM Sans" pitchFamily="34" charset="-122"/>
                 <a:cs typeface="DM Sans" pitchFamily="34" charset="-120"/>
               </a:rPr>
-              <a:t>Looking forward to building this with you and the Accountable Equity team — let's find time in July.</a:t>
+              <a:t>Looking forward to entitling and monetizing the course lands with you and the Accountable Equity team — let's find time in July.</a:t>
             </a:r>
             <a:endParaRPr lang="en-US" sz="1400" dirty="0"/>
           </a:p>
@@ -9173,7 +9182,7 @@
                 <a:ea typeface="Montserrat" pitchFamily="34" charset="-122"/>
                 <a:cs typeface="Montserrat" pitchFamily="34" charset="-120"/>
               </a:rPr>
-              <a:t>A 1,000-acre land bank — owned, and waiting.</a:t>
+              <a:t>Sell the land around the courses you own.</a:t>
             </a:r>
             <a:endParaRPr lang="en-US" sz="2500" dirty="0"/>
           </a:p>
@@ -9215,7 +9224,7 @@
                 <a:ea typeface="DM Sans" pitchFamily="34" charset="-122"/>
                 <a:cs typeface="DM Sans" pitchFamily="34" charset="-120"/>
               </a:rPr>
-              <a:t>Bob — here's how I'd think about turning Accountable Equity's land into cash, and exactly where I can help.</a:t>
+              <a:t>Bob — the fastest, lowest-risk money here is the developable land wrapped around the golf courses: entitle it, sell finished lots to homebuilders, recycle the proceeds.</a:t>
             </a:r>
             <a:endParaRPr lang="en-US" sz="1300" dirty="0"/>
           </a:p>
@@ -9279,7 +9288,7 @@
                 <a:ea typeface="Montserrat" pitchFamily="34" charset="-122"/>
                 <a:cs typeface="Montserrat" pitchFamily="34" charset="-120"/>
               </a:rPr>
-              <a:t>1,000+</a:t>
+              <a:t>700 ac</a:t>
             </a:r>
             <a:endParaRPr lang="en-US" sz="2700" dirty="0"/>
           </a:p>
@@ -9318,7 +9327,7 @@
                 <a:ea typeface="Montserrat" pitchFamily="34" charset="-122"/>
                 <a:cs typeface="Montserrat" pitchFamily="34" charset="-120"/>
               </a:rPr>
-              <a:t>Acres of developable land</a:t>
+              <a:t>At Queenstown Harbor</a:t>
             </a:r>
             <a:endParaRPr lang="en-US" sz="1200" dirty="0"/>
           </a:p>
@@ -9357,7 +9366,7 @@
                 <a:ea typeface="DM Sans" pitchFamily="34" charset="-122"/>
                 <a:cs typeface="DM Sans" pitchFamily="34" charset="-120"/>
               </a:rPr>
-              <a:t>Across MD, NJ &amp; VA — owned, not optioned</a:t>
+              <a:t>3 courses · ~45 min to Annapolis &amp; D.C.</a:t>
             </a:r>
             <a:endParaRPr lang="en-US" sz="1000" dirty="0"/>
           </a:p>
@@ -9413,7 +9422,7 @@
               <a:buNone/>
             </a:pPr>
             <a:r>
-              <a:rPr lang="en-US" sz="2700" b="1" dirty="0">
+              <a:rPr lang="en-US" sz="2200" b="1" dirty="0">
                 <a:solidFill>
                   <a:srgbClr val="0B163C"/>
                 </a:solidFill>
@@ -9421,9 +9430,9 @@
                 <a:ea typeface="Montserrat" pitchFamily="34" charset="-122"/>
                 <a:cs typeface="Montserrat" pitchFamily="34" charset="-120"/>
               </a:rPr>
-              <a:t>700</a:t>
-            </a:r>
-            <a:endParaRPr lang="en-US" sz="2700" dirty="0"/>
+              <a:t>~175 ac</a:t>
+            </a:r>
+            <a:endParaRPr lang="en-US" sz="2200" dirty="0"/>
           </a:p>
         </p:txBody>
       </p:sp>
@@ -9460,7 +9469,7 @@
                 <a:ea typeface="Montserrat" pitchFamily="34" charset="-122"/>
                 <a:cs typeface="Montserrat" pitchFamily="34" charset="-120"/>
               </a:rPr>
-              <a:t>Acres at Queenstown Harbor</a:t>
+              <a:t>Developable to lots</a:t>
             </a:r>
             <a:endParaRPr lang="en-US" sz="1200" dirty="0"/>
           </a:p>
@@ -9499,7 +9508,7 @@
                 <a:ea typeface="DM Sans" pitchFamily="34" charset="-122"/>
                 <a:cs typeface="DM Sans" pitchFamily="34" charset="-120"/>
               </a:rPr>
-              <a:t>Flagship golf resort near Annapolis &amp; D.C.</a:t>
+              <a:t>Around the fairways (illustrative)</a:t>
             </a:r>
             <a:endParaRPr lang="en-US" sz="1000" dirty="0"/>
           </a:p>
@@ -9563,7 +9572,7 @@
                 <a:ea typeface="Montserrat" pitchFamily="34" charset="-122"/>
                 <a:cs typeface="Montserrat" pitchFamily="34" charset="-120"/>
               </a:rPr>
-              <a:t>~1.5M SF</a:t>
+              <a:t>~350 lots</a:t>
             </a:r>
             <a:endParaRPr lang="en-US" sz="2200" dirty="0"/>
           </a:p>
@@ -9602,7 +9611,7 @@
                 <a:ea typeface="Montserrat" pitchFamily="34" charset="-122"/>
                 <a:cs typeface="Montserrat" pitchFamily="34" charset="-120"/>
               </a:rPr>
-              <a:t>Stabilized commercial base</a:t>
+              <a:t>Entitlement potential</a:t>
             </a:r>
             <a:endParaRPr lang="en-US" sz="1200" dirty="0"/>
           </a:p>
@@ -9641,7 +9650,7 @@
                 <a:ea typeface="DM Sans" pitchFamily="34" charset="-122"/>
                 <a:cs typeface="DM Sans" pitchFamily="34" charset="-120"/>
               </a:rPr>
-              <a:t>Lockheed (Arlington TX), Las Vegas, Philadelphia</a:t>
+              <a:t>Sold to regional homebuilders (illustrative)</a:t>
             </a:r>
             <a:endParaRPr lang="en-US" sz="1000" dirty="0"/>
           </a:p>
@@ -9705,7 +9714,7 @@
                 <a:ea typeface="Montserrat" pitchFamily="34" charset="-122"/>
                 <a:cs typeface="Montserrat" pitchFamily="34" charset="-120"/>
               </a:rPr>
-              <a:t>Up to $100M</a:t>
+              <a:t>Soft costs</a:t>
             </a:r>
             <a:endParaRPr lang="en-US" sz="1900" dirty="0"/>
           </a:p>
@@ -9744,7 +9753,7 @@
                 <a:ea typeface="Montserrat" pitchFamily="34" charset="-122"/>
                 <a:cs typeface="Montserrat" pitchFamily="34" charset="-120"/>
               </a:rPr>
-              <a:t>Capital program contemplated</a:t>
+              <a:t>To begin</a:t>
             </a:r>
             <a:endParaRPr lang="en-US" sz="1200" dirty="0"/>
           </a:p>
@@ -9783,7 +9792,7 @@
                 <a:ea typeface="DM Sans" pitchFamily="34" charset="-122"/>
                 <a:cs typeface="DM Sans" pitchFamily="34" charset="-120"/>
               </a:rPr>
-              <a:t>Debt, equity &amp; development partners</a:t>
+              <a:t>Builders fund the horizontal infrastructure</a:t>
             </a:r>
             <a:endParaRPr lang="en-US" sz="1000" dirty="0"/>
           </a:p>
@@ -9862,7 +9871,7 @@
                 <a:ea typeface="Montserrat" pitchFamily="34" charset="-122"/>
                 <a:cs typeface="Montserrat" pitchFamily="34" charset="-120"/>
               </a:rPr>
-              <a:t>WHY THIS MOVES NOW</a:t>
+              <a:t>WHY THE LAND BANK FIRST</a:t>
             </a:r>
             <a:endParaRPr lang="en-US" sz="1000" dirty="0"/>
           </a:p>
@@ -9904,7 +9913,7 @@
                 <a:ea typeface="Montserrat" pitchFamily="34" charset="-122"/>
                 <a:cs typeface="Montserrat" pitchFamily="34" charset="-120"/>
               </a:rPr>
-              <a:t>The hotels are at capacity — turning business away and "not making a dime" on it.</a:t>
+              <a:t>The equity is already in the ground — you own the land free and clear.</a:t>
             </a:r>
             <a:endParaRPr lang="en-US" sz="1450" dirty="0"/>
           </a:p>
@@ -9946,7 +9955,7 @@
                 <a:ea typeface="DM Sans" pitchFamily="34" charset="-122"/>
                 <a:cs typeface="DM Sans" pitchFamily="34" charset="-120"/>
               </a:rPr>
-              <a:t>Land is owned free and clear — the hardest, most expensive input is already on the balance sheet.</a:t>
+              <a:t>Builders fund sewer, roads and utilities — you carry approvals, not construction risk.</a:t>
             </a:r>
             <a:endParaRPr lang="en-US" sz="1000" dirty="0"/>
           </a:p>
@@ -9988,7 +9997,7 @@
                 <a:ea typeface="DM Sans" pitchFamily="34" charset="-122"/>
                 <a:cs typeface="DM Sans" pitchFamily="34" charset="-120"/>
               </a:rPr>
-              <a:t>Town relationships are real — one municipality has offered to contribute land to build on.</a:t>
+              <a:t>Golf frontage commands a premium — lots on a course sell faster and for more.</a:t>
             </a:r>
             <a:endParaRPr lang="en-US" sz="1000" dirty="0"/>
           </a:p>
@@ -10030,7 +10039,7 @@
                 <a:ea typeface="DM Sans" pitchFamily="34" charset="-122"/>
                 <a:cs typeface="DM Sans" pitchFamily="34" charset="-120"/>
               </a:rPr>
-              <a:t>Josh McCallan turns properties into destinations — a proven operator de-risks the demand side.</a:t>
+              <a:t>One town has offered to contribute land — the entitlement tailwinds are real.</a:t>
             </a:r>
             <a:endParaRPr lang="en-US" sz="1000" dirty="0"/>
           </a:p>
@@ -10072,7 +10081,7 @@
                 <a:ea typeface="DM Sans" pitchFamily="34" charset="-122"/>
                 <a:cs typeface="DM Sans" pitchFamily="34" charset="-120"/>
               </a:rPr>
-              <a:t>What's missing is capital + bandwidth — precisely the gap JAL is built to fill.</a:t>
+              <a:t>Proceeds recycle — lot sales can seed the broader Accountable Equity program.</a:t>
             </a:r>
             <a:endParaRPr lang="en-US" sz="1000" dirty="0"/>
           </a:p>
@@ -10339,7 +10348,7 @@
                 <a:ea typeface="Montserrat" pitchFamily="34" charset="-122"/>
                 <a:cs typeface="Montserrat" pitchFamily="34" charset="-120"/>
               </a:rPr>
-              <a:t>THE PORTFOLIO</a:t>
+              <a:t>THE LAND</a:t>
             </a:r>
             <a:endParaRPr lang="en-US" sz="1000" dirty="0"/>
           </a:p>
@@ -10378,7 +10387,7 @@
                 <a:ea typeface="Montserrat" pitchFamily="34" charset="-122"/>
                 <a:cs typeface="Montserrat" pitchFamily="34" charset="-120"/>
               </a:rPr>
-              <a:t>Five hospitality assets, one commercial base.</a:t>
+              <a:t>Golf-course land, course by course.</a:t>
             </a:r>
             <a:endParaRPr lang="en-US" sz="2500" dirty="0"/>
           </a:p>
@@ -10420,7 +10429,7 @@
                 <a:ea typeface="DM Sans" pitchFamily="34" charset="-122"/>
                 <a:cs typeface="DM Sans" pitchFamily="34" charset="-120"/>
               </a:rPr>
-              <a:t>Land grouped by what it can become. Hospitality parcels drive the development upside; the commercial portfolio anchors cash flow and collateral.</a:t>
+              <a:t>Each course already amenitizes the land around it. We entitle the developable acreage and sell finished lots — and the same playbook repeats on every course in the portfolio.</a:t>
             </a:r>
             <a:endParaRPr lang="en-US" sz="1300" dirty="0"/>
           </a:p>
@@ -10435,7 +10444,7 @@
         <p:spPr>
           <a:xfrm>
             <a:off x="457200" y="1874520"/>
-            <a:ext cx="2057400" cy="365760"/>
+            <a:ext cx="2286000" cy="365760"/>
           </a:xfrm>
           <a:prstGeom prst="rect">
             <a:avLst/>
@@ -10455,7 +10464,7 @@
         <p:spPr>
           <a:xfrm>
             <a:off x="457200" y="1874520"/>
-            <a:ext cx="2057400" cy="365760"/>
+            <a:ext cx="2286000" cy="365760"/>
           </a:xfrm>
           <a:prstGeom prst="rect">
             <a:avLst/>
@@ -10479,7 +10488,7 @@
                 <a:ea typeface="Montserrat" pitchFamily="34" charset="-122"/>
                 <a:cs typeface="Montserrat" pitchFamily="34" charset="-120"/>
               </a:rPr>
-              <a:t>Asset</a:t>
+              <a:t>Course</a:t>
             </a:r>
             <a:endParaRPr lang="en-US" sz="900" dirty="0"/>
           </a:p>
@@ -10493,8 +10502,8 @@
         </p:nvSpPr>
         <p:spPr>
           <a:xfrm>
-            <a:off x="2514600" y="1874520"/>
-            <a:ext cx="1691640" cy="365760"/>
+            <a:off x="2743200" y="1874520"/>
+            <a:ext cx="1828800" cy="365760"/>
           </a:xfrm>
           <a:prstGeom prst="rect">
             <a:avLst/>
@@ -10513,8 +10522,8 @@
         </p:nvSpPr>
         <p:spPr>
           <a:xfrm>
-            <a:off x="2514600" y="1874520"/>
-            <a:ext cx="1691640" cy="365760"/>
+            <a:off x="2743200" y="1874520"/>
+            <a:ext cx="1828800" cy="365760"/>
           </a:xfrm>
           <a:prstGeom prst="rect">
             <a:avLst/>
@@ -10552,8 +10561,8 @@
         </p:nvSpPr>
         <p:spPr>
           <a:xfrm>
-            <a:off x="4206240" y="1874520"/>
-            <a:ext cx="3246120" cy="365760"/>
+            <a:off x="4572000" y="1874520"/>
+            <a:ext cx="3291840" cy="365760"/>
           </a:xfrm>
           <a:prstGeom prst="rect">
             <a:avLst/>
@@ -10572,8 +10581,8 @@
         </p:nvSpPr>
         <p:spPr>
           <a:xfrm>
-            <a:off x="4206240" y="1874520"/>
-            <a:ext cx="3246120" cy="365760"/>
+            <a:off x="4572000" y="1874520"/>
+            <a:ext cx="3291840" cy="365760"/>
           </a:xfrm>
           <a:prstGeom prst="rect">
             <a:avLst/>
@@ -10597,7 +10606,7 @@
                 <a:ea typeface="Montserrat" pitchFamily="34" charset="-122"/>
                 <a:cs typeface="Montserrat" pitchFamily="34" charset="-120"/>
               </a:rPr>
-              <a:t>Profile</a:t>
+              <a:t>Setting</a:t>
             </a:r>
             <a:endParaRPr lang="en-US" sz="900" dirty="0"/>
           </a:p>
@@ -10611,8 +10620,8 @@
         </p:nvSpPr>
         <p:spPr>
           <a:xfrm>
-            <a:off x="7452360" y="1874520"/>
-            <a:ext cx="4279392" cy="365760"/>
+            <a:off x="7863840" y="1874520"/>
+            <a:ext cx="3867912" cy="365760"/>
           </a:xfrm>
           <a:prstGeom prst="rect">
             <a:avLst/>
@@ -10631,8 +10640,8 @@
         </p:nvSpPr>
         <p:spPr>
           <a:xfrm>
-            <a:off x="7452360" y="1874520"/>
-            <a:ext cx="4279392" cy="365760"/>
+            <a:off x="7863840" y="1874520"/>
+            <a:ext cx="3867912" cy="365760"/>
           </a:xfrm>
           <a:prstGeom prst="rect">
             <a:avLst/>
@@ -10656,7 +10665,7 @@
                 <a:ea typeface="Montserrat" pitchFamily="34" charset="-122"/>
                 <a:cs typeface="Montserrat" pitchFamily="34" charset="-120"/>
               </a:rPr>
-              <a:t>Development thesis</a:t>
+              <a:t>Land-bank thesis</a:t>
             </a:r>
             <a:endParaRPr lang="en-US" sz="900" dirty="0"/>
           </a:p>
@@ -10671,7 +10680,7 @@
         <p:spPr>
           <a:xfrm>
             <a:off x="457200" y="2240280"/>
-            <a:ext cx="2057400" cy="548640"/>
+            <a:ext cx="2286000" cy="749808"/>
           </a:xfrm>
           <a:prstGeom prst="rect">
             <a:avLst/>
@@ -10691,7 +10700,7 @@
         <p:spPr>
           <a:xfrm>
             <a:off x="457200" y="2240280"/>
-            <a:ext cx="2057400" cy="548640"/>
+            <a:ext cx="2286000" cy="749808"/>
           </a:xfrm>
           <a:prstGeom prst="rect">
             <a:avLst/>
@@ -10729,8 +10738,8 @@
         </p:nvSpPr>
         <p:spPr>
           <a:xfrm>
-            <a:off x="2514600" y="2240280"/>
-            <a:ext cx="1691640" cy="548640"/>
+            <a:off x="2743200" y="2240280"/>
+            <a:ext cx="1828800" cy="749808"/>
           </a:xfrm>
           <a:prstGeom prst="rect">
             <a:avLst/>
@@ -10749,8 +10758,8 @@
         </p:nvSpPr>
         <p:spPr>
           <a:xfrm>
-            <a:off x="2514600" y="2240280"/>
-            <a:ext cx="1691640" cy="548640"/>
+            <a:off x="2743200" y="2240280"/>
+            <a:ext cx="1828800" cy="749808"/>
           </a:xfrm>
           <a:prstGeom prst="rect">
             <a:avLst/>
@@ -10788,8 +10797,8 @@
         </p:nvSpPr>
         <p:spPr>
           <a:xfrm>
-            <a:off x="4206240" y="2240280"/>
-            <a:ext cx="3246120" cy="548640"/>
+            <a:off x="4572000" y="2240280"/>
+            <a:ext cx="3291840" cy="749808"/>
           </a:xfrm>
           <a:prstGeom prst="rect">
             <a:avLst/>
@@ -10808,8 +10817,8 @@
         </p:nvSpPr>
         <p:spPr>
           <a:xfrm>
-            <a:off x="4206240" y="2240280"/>
-            <a:ext cx="3246120" cy="548640"/>
+            <a:off x="4572000" y="2240280"/>
+            <a:ext cx="3291840" cy="749808"/>
           </a:xfrm>
           <a:prstGeom prst="rect">
             <a:avLst/>
@@ -10822,6 +10831,9 @@
           <a:lstStyle/>
           <a:p>
             <a:pPr algn="l" indent="0" marL="0">
+              <a:lnSpc>
+                <a:spcPts val="1100"/>
+              </a:lnSpc>
               <a:buNone/>
             </a:pPr>
             <a:r>
@@ -10833,7 +10845,7 @@
                 <a:ea typeface="DM Sans" pitchFamily="34" charset="-122"/>
                 <a:cs typeface="DM Sans" pitchFamily="34" charset="-120"/>
               </a:rPr>
-              <a:t>700 ac · 3 courses · near Annapolis &amp; D.C.</a:t>
+              <a:t>700 ac · 3 courses · ~45 min to Annapolis / D.C.</a:t>
             </a:r>
             <a:endParaRPr lang="en-US" sz="950" dirty="0"/>
           </a:p>
@@ -10847,8 +10859,8 @@
         </p:nvSpPr>
         <p:spPr>
           <a:xfrm>
-            <a:off x="7452360" y="2240280"/>
-            <a:ext cx="4279392" cy="548640"/>
+            <a:off x="7863840" y="2240280"/>
+            <a:ext cx="3867912" cy="749808"/>
           </a:xfrm>
           <a:prstGeom prst="rect">
             <a:avLst/>
@@ -10867,8 +10879,8 @@
         </p:nvSpPr>
         <p:spPr>
           <a:xfrm>
-            <a:off x="7452360" y="2240280"/>
-            <a:ext cx="4279392" cy="548640"/>
+            <a:off x="7863840" y="2240280"/>
+            <a:ext cx="3867912" cy="749808"/>
           </a:xfrm>
           <a:prstGeom prst="rect">
             <a:avLst/>
@@ -10895,7 +10907,7 @@
                 <a:ea typeface="DM Sans" pitchFamily="34" charset="-122"/>
                 <a:cs typeface="DM Sans" pitchFamily="34" charset="-120"/>
               </a:rPr>
-              <a:t>Entitle &amp; sell residential lots around the courses; add hotel keys for overflow</a:t>
+              <a:t>Entitle &amp; sell residential lots around the fairways; builder-funded infrastructure</a:t>
             </a:r>
             <a:endParaRPr lang="en-US" sz="950" dirty="0"/>
           </a:p>
@@ -10909,8 +10921,8 @@
         </p:nvSpPr>
         <p:spPr>
           <a:xfrm>
-            <a:off x="457200" y="2788920"/>
-            <a:ext cx="2057400" cy="548640"/>
+            <a:off x="457200" y="2990088"/>
+            <a:ext cx="2286000" cy="749808"/>
           </a:xfrm>
           <a:prstGeom prst="rect">
             <a:avLst/>
@@ -10929,8 +10941,8 @@
         </p:nvSpPr>
         <p:spPr>
           <a:xfrm>
-            <a:off x="457200" y="2788920"/>
-            <a:ext cx="2057400" cy="548640"/>
+            <a:off x="457200" y="2990088"/>
+            <a:ext cx="2286000" cy="749808"/>
           </a:xfrm>
           <a:prstGeom prst="rect">
             <a:avLst/>
@@ -10954,7 +10966,7 @@
                 <a:ea typeface="Montserrat" pitchFamily="34" charset="-122"/>
                 <a:cs typeface="Montserrat" pitchFamily="34" charset="-120"/>
               </a:rPr>
-              <a:t>Kent Island Resort</a:t>
+              <a:t>LBI National Golf</a:t>
             </a:r>
             <a:endParaRPr lang="en-US" sz="1000" dirty="0"/>
           </a:p>
@@ -10968,8 +10980,8 @@
         </p:nvSpPr>
         <p:spPr>
           <a:xfrm>
-            <a:off x="2514600" y="2788920"/>
-            <a:ext cx="1691640" cy="548640"/>
+            <a:off x="2743200" y="2990088"/>
+            <a:ext cx="1828800" cy="749808"/>
           </a:xfrm>
           <a:prstGeom prst="rect">
             <a:avLst/>
@@ -10988,8 +11000,8 @@
         </p:nvSpPr>
         <p:spPr>
           <a:xfrm>
-            <a:off x="2514600" y="2788920"/>
-            <a:ext cx="1691640" cy="548640"/>
+            <a:off x="2743200" y="2990088"/>
+            <a:ext cx="1828800" cy="749808"/>
           </a:xfrm>
           <a:prstGeom prst="rect">
             <a:avLst/>
@@ -11013,7 +11025,7 @@
                 <a:ea typeface="DM Sans" pitchFamily="34" charset="-122"/>
                 <a:cs typeface="DM Sans" pitchFamily="34" charset="-120"/>
               </a:rPr>
-              <a:t>Kent Island, MD</a:t>
+              <a:t>Long Beach Island, NJ</a:t>
             </a:r>
             <a:endParaRPr lang="en-US" sz="950" dirty="0"/>
           </a:p>
@@ -11027,8 +11039,8 @@
         </p:nvSpPr>
         <p:spPr>
           <a:xfrm>
-            <a:off x="4206240" y="2788920"/>
-            <a:ext cx="3246120" cy="548640"/>
+            <a:off x="4572000" y="2990088"/>
+            <a:ext cx="3291840" cy="749808"/>
           </a:xfrm>
           <a:prstGeom prst="rect">
             <a:avLst/>
@@ -11047,8 +11059,8 @@
         </p:nvSpPr>
         <p:spPr>
           <a:xfrm>
-            <a:off x="4206240" y="2788920"/>
-            <a:ext cx="3246120" cy="548640"/>
+            <a:off x="4572000" y="2990088"/>
+            <a:ext cx="3291840" cy="749808"/>
           </a:xfrm>
           <a:prstGeom prst="rect">
             <a:avLst/>
@@ -11061,6 +11073,9 @@
           <a:lstStyle/>
           <a:p>
             <a:pPr algn="l" indent="0" marL="0">
+              <a:lnSpc>
+                <a:spcPts val="1100"/>
+              </a:lnSpc>
               <a:buNone/>
             </a:pPr>
             <a:r>
@@ -11072,7 +11087,7 @@
                 <a:ea typeface="DM Sans" pitchFamily="34" charset="-122"/>
                 <a:cs typeface="DM Sans" pitchFamily="34" charset="-120"/>
               </a:rPr>
-              <a:t>Chesapeake Bay waterfront resort</a:t>
+              <a:t>Coastal golf in a high-barrier shore market</a:t>
             </a:r>
             <a:endParaRPr lang="en-US" sz="950" dirty="0"/>
           </a:p>
@@ -11086,8 +11101,8 @@
         </p:nvSpPr>
         <p:spPr>
           <a:xfrm>
-            <a:off x="7452360" y="2788920"/>
-            <a:ext cx="4279392" cy="548640"/>
+            <a:off x="7863840" y="2990088"/>
+            <a:ext cx="3867912" cy="749808"/>
           </a:xfrm>
           <a:prstGeom prst="rect">
             <a:avLst/>
@@ -11106,8 +11121,8 @@
         </p:nvSpPr>
         <p:spPr>
           <a:xfrm>
-            <a:off x="7452360" y="2788920"/>
-            <a:ext cx="4279392" cy="548640"/>
+            <a:off x="7863840" y="2990088"/>
+            <a:ext cx="3867912" cy="749808"/>
           </a:xfrm>
           <a:prstGeom prst="rect">
             <a:avLst/>
@@ -11134,7 +11149,7 @@
                 <a:ea typeface="DM Sans" pitchFamily="34" charset="-122"/>
                 <a:cs typeface="DM Sans" pitchFamily="34" charset="-120"/>
               </a:rPr>
-              <a:t>Expand keys + destination amenities; capture turned-away demand</a:t>
+              <a:t>Scarce Jersey-Shore lots; premium entitled-lot sales</a:t>
             </a:r>
             <a:endParaRPr lang="en-US" sz="950" dirty="0"/>
           </a:p>
@@ -11148,8 +11163,8 @@
         </p:nvSpPr>
         <p:spPr>
           <a:xfrm>
-            <a:off x="457200" y="3337560"/>
-            <a:ext cx="2057400" cy="548640"/>
+            <a:off x="457200" y="3739896"/>
+            <a:ext cx="2286000" cy="749808"/>
           </a:xfrm>
           <a:prstGeom prst="rect">
             <a:avLst/>
@@ -11168,8 +11183,8 @@
         </p:nvSpPr>
         <p:spPr>
           <a:xfrm>
-            <a:off x="457200" y="3337560"/>
-            <a:ext cx="2057400" cy="548640"/>
+            <a:off x="457200" y="3739896"/>
+            <a:ext cx="2286000" cy="749808"/>
           </a:xfrm>
           <a:prstGeom prst="rect">
             <a:avLst/>
@@ -11193,7 +11208,7 @@
                 <a:ea typeface="Montserrat" pitchFamily="34" charset="-122"/>
                 <a:cs typeface="Montserrat" pitchFamily="34" charset="-120"/>
               </a:rPr>
-              <a:t>LBI National Golf</a:t>
+              <a:t>Recently acquired course</a:t>
             </a:r>
             <a:endParaRPr lang="en-US" sz="1000" dirty="0"/>
           </a:p>
@@ -11207,8 +11222,8 @@
         </p:nvSpPr>
         <p:spPr>
           <a:xfrm>
-            <a:off x="2514600" y="3337560"/>
-            <a:ext cx="1691640" cy="548640"/>
+            <a:off x="2743200" y="3739896"/>
+            <a:ext cx="1828800" cy="749808"/>
           </a:xfrm>
           <a:prstGeom prst="rect">
             <a:avLst/>
@@ -11227,8 +11242,8 @@
         </p:nvSpPr>
         <p:spPr>
           <a:xfrm>
-            <a:off x="2514600" y="3337560"/>
-            <a:ext cx="1691640" cy="548640"/>
+            <a:off x="2743200" y="3739896"/>
+            <a:ext cx="1828800" cy="749808"/>
           </a:xfrm>
           <a:prstGeom prst="rect">
             <a:avLst/>
@@ -11252,7 +11267,7 @@
                 <a:ea typeface="DM Sans" pitchFamily="34" charset="-122"/>
                 <a:cs typeface="DM Sans" pitchFamily="34" charset="-120"/>
               </a:rPr>
-              <a:t>Long Beach Island, NJ</a:t>
+              <a:t>Mid-Atlantic</a:t>
             </a:r>
             <a:endParaRPr lang="en-US" sz="950" dirty="0"/>
           </a:p>
@@ -11266,8 +11281,8 @@
         </p:nvSpPr>
         <p:spPr>
           <a:xfrm>
-            <a:off x="4206240" y="3337560"/>
-            <a:ext cx="3246120" cy="548640"/>
+            <a:off x="4572000" y="3739896"/>
+            <a:ext cx="3291840" cy="749808"/>
           </a:xfrm>
           <a:prstGeom prst="rect">
             <a:avLst/>
@@ -11286,8 +11301,8 @@
         </p:nvSpPr>
         <p:spPr>
           <a:xfrm>
-            <a:off x="4206240" y="3337560"/>
-            <a:ext cx="3246120" cy="548640"/>
+            <a:off x="4572000" y="3739896"/>
+            <a:ext cx="3291840" cy="749808"/>
           </a:xfrm>
           <a:prstGeom prst="rect">
             <a:avLst/>
@@ -11300,6 +11315,9 @@
           <a:lstStyle/>
           <a:p>
             <a:pPr algn="l" indent="0" marL="0">
+              <a:lnSpc>
+                <a:spcPts val="1100"/>
+              </a:lnSpc>
               <a:buNone/>
             </a:pPr>
             <a:r>
@@ -11311,7 +11329,7 @@
                 <a:ea typeface="DM Sans" pitchFamily="34" charset="-122"/>
                 <a:cs typeface="DM Sans" pitchFamily="34" charset="-120"/>
               </a:rPr>
-              <a:t>Coastal golf in a high-barrier shore market</a:t>
+              <a:t>Newly added to the golf portfolio</a:t>
             </a:r>
             <a:endParaRPr lang="en-US" sz="950" dirty="0"/>
           </a:p>
@@ -11325,8 +11343,8 @@
         </p:nvSpPr>
         <p:spPr>
           <a:xfrm>
-            <a:off x="7452360" y="3337560"/>
-            <a:ext cx="4279392" cy="548640"/>
+            <a:off x="7863840" y="3739896"/>
+            <a:ext cx="3867912" cy="749808"/>
           </a:xfrm>
           <a:prstGeom prst="rect">
             <a:avLst/>
@@ -11345,8 +11363,8 @@
         </p:nvSpPr>
         <p:spPr>
           <a:xfrm>
-            <a:off x="7452360" y="3337560"/>
-            <a:ext cx="4279392" cy="548640"/>
+            <a:off x="7863840" y="3739896"/>
+            <a:ext cx="3867912" cy="749808"/>
           </a:xfrm>
           <a:prstGeom prst="rect">
             <a:avLst/>
@@ -11373,7 +11391,7 @@
                 <a:ea typeface="DM Sans" pitchFamily="34" charset="-122"/>
                 <a:cs typeface="DM Sans" pitchFamily="34" charset="-120"/>
               </a:rPr>
-              <a:t>Entitled lot sales + boutique coastal hospitality</a:t>
+              <a:t>Repeat the entitle-and-sell template on fresh acreage</a:t>
             </a:r>
             <a:endParaRPr lang="en-US" sz="950" dirty="0"/>
           </a:p>
@@ -11387,8 +11405,8 @@
         </p:nvSpPr>
         <p:spPr>
           <a:xfrm>
-            <a:off x="457200" y="3886200"/>
-            <a:ext cx="2057400" cy="548640"/>
+            <a:off x="457200" y="4489704"/>
+            <a:ext cx="2286000" cy="749808"/>
           </a:xfrm>
           <a:prstGeom prst="rect">
             <a:avLst/>
@@ -11407,8 +11425,8 @@
         </p:nvSpPr>
         <p:spPr>
           <a:xfrm>
-            <a:off x="457200" y="3886200"/>
-            <a:ext cx="2057400" cy="548640"/>
+            <a:off x="457200" y="4489704"/>
+            <a:ext cx="2286000" cy="749808"/>
           </a:xfrm>
           <a:prstGeom prst="rect">
             <a:avLst/>
@@ -11432,7 +11450,7 @@
                 <a:ea typeface="Montserrat" pitchFamily="34" charset="-122"/>
                 <a:cs typeface="Montserrat" pitchFamily="34" charset="-120"/>
               </a:rPr>
-              <a:t>Bohemia Manor</a:t>
+              <a:t>Across the portfolio</a:t>
             </a:r>
             <a:endParaRPr lang="en-US" sz="1000" dirty="0"/>
           </a:p>
@@ -11446,8 +11464,8 @@
         </p:nvSpPr>
         <p:spPr>
           <a:xfrm>
-            <a:off x="2514600" y="3886200"/>
-            <a:ext cx="1691640" cy="548640"/>
+            <a:off x="2743200" y="4489704"/>
+            <a:ext cx="1828800" cy="749808"/>
           </a:xfrm>
           <a:prstGeom prst="rect">
             <a:avLst/>
@@ -11466,8 +11484,8 @@
         </p:nvSpPr>
         <p:spPr>
           <a:xfrm>
-            <a:off x="2514600" y="3886200"/>
-            <a:ext cx="1691640" cy="548640"/>
+            <a:off x="2743200" y="4489704"/>
+            <a:ext cx="1828800" cy="749808"/>
           </a:xfrm>
           <a:prstGeom prst="rect">
             <a:avLst/>
@@ -11483,673 +11501,198 @@
               <a:buNone/>
             </a:pPr>
             <a:r>
-              <a:rPr lang="en-US" sz="950" dirty="0">
-                <a:solidFill>
-                  <a:srgbClr val="6B5A6B"/>
+              <a:rPr lang="en-US" sz="950" b="1" dirty="0">
+                <a:solidFill>
+                  <a:srgbClr val="3A243A"/>
+                </a:solidFill>
+                <a:latin typeface="Montserrat" pitchFamily="34" charset="0"/>
+                <a:ea typeface="Montserrat" pitchFamily="34" charset="-122"/>
+                <a:cs typeface="Montserrat" pitchFamily="34" charset="-120"/>
+              </a:rPr>
+              <a:t>MD · NJ</a:t>
+            </a:r>
+            <a:endParaRPr lang="en-US" sz="950" dirty="0"/>
+          </a:p>
+        </p:txBody>
+      </p:sp>
+      <p:sp>
+        <p:nvSpPr>
+          <p:cNvPr id="47" name="Shape 45"/>
+          <p:cNvSpPr/>
+          <p:nvPr/>
+        </p:nvSpPr>
+        <p:spPr>
+          <a:xfrm>
+            <a:off x="4572000" y="4489704"/>
+            <a:ext cx="3291840" cy="749808"/>
+          </a:xfrm>
+          <a:prstGeom prst="rect">
+            <a:avLst/>
+          </a:prstGeom>
+          <a:solidFill>
+            <a:srgbClr val="F4F2ED"/>
+          </a:solidFill>
+          <a:ln/>
+        </p:spPr>
+      </p:sp>
+      <p:sp>
+        <p:nvSpPr>
+          <p:cNvPr id="48" name="Text 46"/>
+          <p:cNvSpPr/>
+          <p:nvPr/>
+        </p:nvSpPr>
+        <p:spPr>
+          <a:xfrm>
+            <a:off x="4572000" y="4489704"/>
+            <a:ext cx="3291840" cy="749808"/>
+          </a:xfrm>
+          <a:prstGeom prst="rect">
+            <a:avLst/>
+          </a:prstGeom>
+          <a:noFill/>
+          <a:ln/>
+        </p:spPr>
+        <p:txBody>
+          <a:bodyPr wrap="square" lIns="25400" tIns="76200" rIns="76200" bIns="25400" rtlCol="0" anchor="ctr"/>
+          <a:lstStyle/>
+          <a:p>
+            <a:pPr algn="l" indent="0" marL="0">
+              <a:lnSpc>
+                <a:spcPts val="1100"/>
+              </a:lnSpc>
+              <a:buNone/>
+            </a:pPr>
+            <a:r>
+              <a:rPr lang="en-US" sz="950" b="1" dirty="0">
+                <a:solidFill>
+                  <a:srgbClr val="0B163C"/>
+                </a:solidFill>
+                <a:latin typeface="Montserrat" pitchFamily="34" charset="0"/>
+                <a:ea typeface="Montserrat" pitchFamily="34" charset="-122"/>
+                <a:cs typeface="Montserrat" pitchFamily="34" charset="-120"/>
+              </a:rPr>
+              <a:t>700+ developable acres around owned courses</a:t>
+            </a:r>
+            <a:endParaRPr lang="en-US" sz="950" dirty="0"/>
+          </a:p>
+        </p:txBody>
+      </p:sp>
+      <p:sp>
+        <p:nvSpPr>
+          <p:cNvPr id="49" name="Shape 47"/>
+          <p:cNvSpPr/>
+          <p:nvPr/>
+        </p:nvSpPr>
+        <p:spPr>
+          <a:xfrm>
+            <a:off x="7863840" y="4489704"/>
+            <a:ext cx="3867912" cy="749808"/>
+          </a:xfrm>
+          <a:prstGeom prst="rect">
+            <a:avLst/>
+          </a:prstGeom>
+          <a:solidFill>
+            <a:srgbClr val="F4F2ED"/>
+          </a:solidFill>
+          <a:ln/>
+        </p:spPr>
+      </p:sp>
+      <p:sp>
+        <p:nvSpPr>
+          <p:cNvPr id="50" name="Text 48"/>
+          <p:cNvSpPr/>
+          <p:nvPr/>
+        </p:nvSpPr>
+        <p:spPr>
+          <a:xfrm>
+            <a:off x="7863840" y="4489704"/>
+            <a:ext cx="3867912" cy="749808"/>
+          </a:xfrm>
+          <a:prstGeom prst="rect">
+            <a:avLst/>
+          </a:prstGeom>
+          <a:noFill/>
+          <a:ln/>
+        </p:spPr>
+        <p:txBody>
+          <a:bodyPr wrap="square" lIns="25400" tIns="76200" rIns="76200" bIns="25400" rtlCol="0" anchor="ctr"/>
+          <a:lstStyle/>
+          <a:p>
+            <a:pPr algn="l" indent="0" marL="0">
+              <a:lnSpc>
+                <a:spcPts val="1100"/>
+              </a:lnSpc>
+              <a:buNone/>
+            </a:pPr>
+            <a:r>
+              <a:rPr lang="en-US" sz="950" b="1" dirty="0">
+                <a:solidFill>
+                  <a:srgbClr val="3A243A"/>
+                </a:solidFill>
+                <a:latin typeface="Montserrat" pitchFamily="34" charset="0"/>
+                <a:ea typeface="Montserrat" pitchFamily="34" charset="-122"/>
+                <a:cs typeface="Montserrat" pitchFamily="34" charset="-120"/>
+              </a:rPr>
+              <a:t>One repeatable, capital-light playbook</a:t>
+            </a:r>
+            <a:endParaRPr lang="en-US" sz="950" dirty="0"/>
+          </a:p>
+        </p:txBody>
+      </p:sp>
+      <p:sp>
+        <p:nvSpPr>
+          <p:cNvPr id="51" name="Shape 49"/>
+          <p:cNvSpPr/>
+          <p:nvPr/>
+        </p:nvSpPr>
+        <p:spPr>
+          <a:xfrm>
+            <a:off x="457200" y="5943600"/>
+            <a:ext cx="11274552" cy="420624"/>
+          </a:xfrm>
+          <a:prstGeom prst="rect">
+            <a:avLst/>
+          </a:prstGeom>
+          <a:solidFill>
+            <a:srgbClr val="3A243A"/>
+          </a:solidFill>
+          <a:ln/>
+        </p:spPr>
+      </p:sp>
+      <p:sp>
+        <p:nvSpPr>
+          <p:cNvPr id="52" name="Text 50"/>
+          <p:cNvSpPr/>
+          <p:nvPr/>
+        </p:nvSpPr>
+        <p:spPr>
+          <a:xfrm>
+            <a:off x="640080" y="5943600"/>
+            <a:ext cx="10908792" cy="420624"/>
+          </a:xfrm>
+          <a:prstGeom prst="rect">
+            <a:avLst/>
+          </a:prstGeom>
+          <a:noFill/>
+          <a:ln/>
+        </p:spPr>
+        <p:txBody>
+          <a:bodyPr wrap="square" lIns="0" tIns="0" rIns="0" bIns="0" rtlCol="0" anchor="ctr"/>
+          <a:lstStyle/>
+          <a:p>
+            <a:pPr algn="ctr" indent="0" marL="0">
+              <a:buNone/>
+            </a:pPr>
+            <a:r>
+              <a:rPr lang="en-US" sz="1100" b="1" dirty="0">
+                <a:solidFill>
+                  <a:srgbClr val="FFFFFF"/>
                 </a:solidFill>
                 <a:latin typeface="DM Sans" pitchFamily="34" charset="0"/>
                 <a:ea typeface="DM Sans" pitchFamily="34" charset="-122"/>
                 <a:cs typeface="DM Sans" pitchFamily="34" charset="-120"/>
               </a:rPr>
-              <a:t>Cecil County, MD</a:t>
-            </a:r>
-            <a:endParaRPr lang="en-US" sz="950" dirty="0"/>
-          </a:p>
-        </p:txBody>
-      </p:sp>
-      <p:sp>
-        <p:nvSpPr>
-          <p:cNvPr id="47" name="Shape 45"/>
-          <p:cNvSpPr/>
-          <p:nvPr/>
-        </p:nvSpPr>
-        <p:spPr>
-          <a:xfrm>
-            <a:off x="4206240" y="3886200"/>
-            <a:ext cx="3246120" cy="548640"/>
-          </a:xfrm>
-          <a:prstGeom prst="rect">
-            <a:avLst/>
-          </a:prstGeom>
-          <a:solidFill>
-            <a:srgbClr val="F4F2ED"/>
-          </a:solidFill>
-          <a:ln/>
-        </p:spPr>
-      </p:sp>
-      <p:sp>
-        <p:nvSpPr>
-          <p:cNvPr id="48" name="Text 46"/>
-          <p:cNvSpPr/>
-          <p:nvPr/>
-        </p:nvSpPr>
-        <p:spPr>
-          <a:xfrm>
-            <a:off x="4206240" y="3886200"/>
-            <a:ext cx="3246120" cy="548640"/>
-          </a:xfrm>
-          <a:prstGeom prst="rect">
-            <a:avLst/>
-          </a:prstGeom>
-          <a:noFill/>
-          <a:ln/>
-        </p:spPr>
-        <p:txBody>
-          <a:bodyPr wrap="square" lIns="25400" tIns="76200" rIns="76200" bIns="25400" rtlCol="0" anchor="ctr"/>
-          <a:lstStyle/>
-          <a:p>
-            <a:pPr algn="l" indent="0" marL="0">
-              <a:buNone/>
-            </a:pPr>
-            <a:r>
-              <a:rPr lang="en-US" sz="950" dirty="0">
-                <a:solidFill>
-                  <a:srgbClr val="0B163C"/>
-                </a:solidFill>
-                <a:latin typeface="DM Sans" pitchFamily="34" charset="0"/>
-                <a:ea typeface="DM Sans" pitchFamily="34" charset="-122"/>
-                <a:cs typeface="DM Sans" pitchFamily="34" charset="-120"/>
-              </a:rPr>
-              <a:t>Historic estate &amp; event grounds</a:t>
-            </a:r>
-            <a:endParaRPr lang="en-US" sz="950" dirty="0"/>
-          </a:p>
-        </p:txBody>
-      </p:sp>
-      <p:sp>
-        <p:nvSpPr>
-          <p:cNvPr id="49" name="Shape 47"/>
-          <p:cNvSpPr/>
-          <p:nvPr/>
-        </p:nvSpPr>
-        <p:spPr>
-          <a:xfrm>
-            <a:off x="7452360" y="3886200"/>
-            <a:ext cx="4279392" cy="548640"/>
-          </a:xfrm>
-          <a:prstGeom prst="rect">
-            <a:avLst/>
-          </a:prstGeom>
-          <a:solidFill>
-            <a:srgbClr val="F4F2ED"/>
-          </a:solidFill>
-          <a:ln/>
-        </p:spPr>
-      </p:sp>
-      <p:sp>
-        <p:nvSpPr>
-          <p:cNvPr id="50" name="Text 48"/>
-          <p:cNvSpPr/>
-          <p:nvPr/>
-        </p:nvSpPr>
-        <p:spPr>
-          <a:xfrm>
-            <a:off x="7452360" y="3886200"/>
-            <a:ext cx="4279392" cy="548640"/>
-          </a:xfrm>
-          <a:prstGeom prst="rect">
-            <a:avLst/>
-          </a:prstGeom>
-          <a:noFill/>
-          <a:ln/>
-        </p:spPr>
-        <p:txBody>
-          <a:bodyPr wrap="square" lIns="25400" tIns="76200" rIns="76200" bIns="25400" rtlCol="0" anchor="ctr"/>
-          <a:lstStyle/>
-          <a:p>
-            <a:pPr algn="l" indent="0" marL="0">
-              <a:lnSpc>
-                <a:spcPts val="1100"/>
-              </a:lnSpc>
-              <a:buNone/>
-            </a:pPr>
-            <a:r>
-              <a:rPr lang="en-US" sz="950" dirty="0">
-                <a:solidFill>
-                  <a:srgbClr val="0B163C"/>
-                </a:solidFill>
-                <a:latin typeface="DM Sans" pitchFamily="34" charset="0"/>
-                <a:ea typeface="DM Sans" pitchFamily="34" charset="-122"/>
-                <a:cs typeface="DM Sans" pitchFamily="34" charset="-120"/>
-              </a:rPr>
-              <a:t>Hospitality + events; winery-style destination template</a:t>
-            </a:r>
-            <a:endParaRPr lang="en-US" sz="950" dirty="0"/>
-          </a:p>
-        </p:txBody>
-      </p:sp>
-      <p:sp>
-        <p:nvSpPr>
-          <p:cNvPr id="51" name="Shape 49"/>
-          <p:cNvSpPr/>
-          <p:nvPr/>
-        </p:nvSpPr>
-        <p:spPr>
-          <a:xfrm>
-            <a:off x="457200" y="4434840"/>
-            <a:ext cx="2057400" cy="548640"/>
-          </a:xfrm>
-          <a:prstGeom prst="rect">
-            <a:avLst/>
-          </a:prstGeom>
-          <a:solidFill>
-            <a:srgbClr val="FFFFFF"/>
-          </a:solidFill>
-          <a:ln/>
-        </p:spPr>
-      </p:sp>
-      <p:sp>
-        <p:nvSpPr>
-          <p:cNvPr id="52" name="Text 50"/>
-          <p:cNvSpPr/>
-          <p:nvPr/>
-        </p:nvSpPr>
-        <p:spPr>
-          <a:xfrm>
-            <a:off x="457200" y="4434840"/>
-            <a:ext cx="2057400" cy="548640"/>
-          </a:xfrm>
-          <a:prstGeom prst="rect">
-            <a:avLst/>
-          </a:prstGeom>
-          <a:noFill/>
-          <a:ln/>
-        </p:spPr>
-        <p:txBody>
-          <a:bodyPr wrap="square" lIns="25400" tIns="76200" rIns="76200" bIns="25400" rtlCol="0" anchor="ctr"/>
-          <a:lstStyle/>
-          <a:p>
-            <a:pPr algn="l" indent="0" marL="0">
-              <a:buNone/>
-            </a:pPr>
-            <a:r>
-              <a:rPr lang="en-US" sz="1000" b="1" dirty="0">
-                <a:solidFill>
-                  <a:srgbClr val="0B163C"/>
-                </a:solidFill>
-                <a:latin typeface="Montserrat" pitchFamily="34" charset="0"/>
-                <a:ea typeface="Montserrat" pitchFamily="34" charset="-122"/>
-                <a:cs typeface="Montserrat" pitchFamily="34" charset="-120"/>
-              </a:rPr>
-              <a:t>Winery HQ</a:t>
-            </a:r>
-            <a:endParaRPr lang="en-US" sz="1000" dirty="0"/>
-          </a:p>
-        </p:txBody>
-      </p:sp>
-      <p:sp>
-        <p:nvSpPr>
-          <p:cNvPr id="53" name="Shape 51"/>
-          <p:cNvSpPr/>
-          <p:nvPr/>
-        </p:nvSpPr>
-        <p:spPr>
-          <a:xfrm>
-            <a:off x="2514600" y="4434840"/>
-            <a:ext cx="1691640" cy="548640"/>
-          </a:xfrm>
-          <a:prstGeom prst="rect">
-            <a:avLst/>
-          </a:prstGeom>
-          <a:solidFill>
-            <a:srgbClr val="FFFFFF"/>
-          </a:solidFill>
-          <a:ln/>
-        </p:spPr>
-      </p:sp>
-      <p:sp>
-        <p:nvSpPr>
-          <p:cNvPr id="54" name="Text 52"/>
-          <p:cNvSpPr/>
-          <p:nvPr/>
-        </p:nvSpPr>
-        <p:spPr>
-          <a:xfrm>
-            <a:off x="2514600" y="4434840"/>
-            <a:ext cx="1691640" cy="548640"/>
-          </a:xfrm>
-          <a:prstGeom prst="rect">
-            <a:avLst/>
-          </a:prstGeom>
-          <a:noFill/>
-          <a:ln/>
-        </p:spPr>
-        <p:txBody>
-          <a:bodyPr wrap="square" lIns="25400" tIns="76200" rIns="76200" bIns="25400" rtlCol="0" anchor="ctr"/>
-          <a:lstStyle/>
-          <a:p>
-            <a:pPr algn="l" indent="0" marL="0">
-              <a:buNone/>
-            </a:pPr>
-            <a:r>
-              <a:rPr lang="en-US" sz="950" dirty="0">
-                <a:solidFill>
-                  <a:srgbClr val="6B5A6B"/>
-                </a:solidFill>
-                <a:latin typeface="DM Sans" pitchFamily="34" charset="0"/>
-                <a:ea typeface="DM Sans" pitchFamily="34" charset="-122"/>
-                <a:cs typeface="DM Sans" pitchFamily="34" charset="-120"/>
-              </a:rPr>
-              <a:t>New Jersey</a:t>
-            </a:r>
-            <a:endParaRPr lang="en-US" sz="950" dirty="0"/>
-          </a:p>
-        </p:txBody>
-      </p:sp>
-      <p:sp>
-        <p:nvSpPr>
-          <p:cNvPr id="55" name="Shape 53"/>
-          <p:cNvSpPr/>
-          <p:nvPr/>
-        </p:nvSpPr>
-        <p:spPr>
-          <a:xfrm>
-            <a:off x="4206240" y="4434840"/>
-            <a:ext cx="3246120" cy="548640"/>
-          </a:xfrm>
-          <a:prstGeom prst="rect">
-            <a:avLst/>
-          </a:prstGeom>
-          <a:solidFill>
-            <a:srgbClr val="FFFFFF"/>
-          </a:solidFill>
-          <a:ln/>
-        </p:spPr>
-      </p:sp>
-      <p:sp>
-        <p:nvSpPr>
-          <p:cNvPr id="56" name="Text 54"/>
-          <p:cNvSpPr/>
-          <p:nvPr/>
-        </p:nvSpPr>
-        <p:spPr>
-          <a:xfrm>
-            <a:off x="4206240" y="4434840"/>
-            <a:ext cx="3246120" cy="548640"/>
-          </a:xfrm>
-          <a:prstGeom prst="rect">
-            <a:avLst/>
-          </a:prstGeom>
-          <a:noFill/>
-          <a:ln/>
-        </p:spPr>
-        <p:txBody>
-          <a:bodyPr wrap="square" lIns="25400" tIns="76200" rIns="76200" bIns="25400" rtlCol="0" anchor="ctr"/>
-          <a:lstStyle/>
-          <a:p>
-            <a:pPr algn="l" indent="0" marL="0">
-              <a:buNone/>
-            </a:pPr>
-            <a:r>
-              <a:rPr lang="en-US" sz="950" dirty="0">
-                <a:solidFill>
-                  <a:srgbClr val="0B163C"/>
-                </a:solidFill>
-                <a:latin typeface="DM Sans" pitchFamily="34" charset="0"/>
-                <a:ea typeface="DM Sans" pitchFamily="34" charset="-122"/>
-                <a:cs typeface="DM Sans" pitchFamily="34" charset="-120"/>
-              </a:rPr>
-              <a:t>Transformed "dump" → destination venue</a:t>
-            </a:r>
-            <a:endParaRPr lang="en-US" sz="950" dirty="0"/>
-          </a:p>
-        </p:txBody>
-      </p:sp>
-      <p:sp>
-        <p:nvSpPr>
-          <p:cNvPr id="57" name="Shape 55"/>
-          <p:cNvSpPr/>
-          <p:nvPr/>
-        </p:nvSpPr>
-        <p:spPr>
-          <a:xfrm>
-            <a:off x="7452360" y="4434840"/>
-            <a:ext cx="4279392" cy="548640"/>
-          </a:xfrm>
-          <a:prstGeom prst="rect">
-            <a:avLst/>
-          </a:prstGeom>
-          <a:solidFill>
-            <a:srgbClr val="FFFFFF"/>
-          </a:solidFill>
-          <a:ln/>
-        </p:spPr>
-      </p:sp>
-      <p:sp>
-        <p:nvSpPr>
-          <p:cNvPr id="58" name="Text 56"/>
-          <p:cNvSpPr/>
-          <p:nvPr/>
-        </p:nvSpPr>
-        <p:spPr>
-          <a:xfrm>
-            <a:off x="7452360" y="4434840"/>
-            <a:ext cx="4279392" cy="548640"/>
-          </a:xfrm>
-          <a:prstGeom prst="rect">
-            <a:avLst/>
-          </a:prstGeom>
-          <a:noFill/>
-          <a:ln/>
-        </p:spPr>
-        <p:txBody>
-          <a:bodyPr wrap="square" lIns="25400" tIns="76200" rIns="76200" bIns="25400" rtlCol="0" anchor="ctr"/>
-          <a:lstStyle/>
-          <a:p>
-            <a:pPr algn="l" indent="0" marL="0">
-              <a:lnSpc>
-                <a:spcPts val="1100"/>
-              </a:lnSpc>
-              <a:buNone/>
-            </a:pPr>
-            <a:r>
-              <a:rPr lang="en-US" sz="950" dirty="0">
-                <a:solidFill>
-                  <a:srgbClr val="0B163C"/>
-                </a:solidFill>
-                <a:latin typeface="DM Sans" pitchFamily="34" charset="0"/>
-                <a:ea typeface="DM Sans" pitchFamily="34" charset="-122"/>
-                <a:cs typeface="DM Sans" pitchFamily="34" charset="-120"/>
-              </a:rPr>
-              <a:t>Proof of concept — the destination playbook other sites replicate</a:t>
-            </a:r>
-            <a:endParaRPr lang="en-US" sz="950" dirty="0"/>
-          </a:p>
-        </p:txBody>
-      </p:sp>
-      <p:sp>
-        <p:nvSpPr>
-          <p:cNvPr id="59" name="Shape 57"/>
-          <p:cNvSpPr/>
-          <p:nvPr/>
-        </p:nvSpPr>
-        <p:spPr>
-          <a:xfrm>
-            <a:off x="457200" y="4983480"/>
-            <a:ext cx="2057400" cy="548640"/>
-          </a:xfrm>
-          <a:prstGeom prst="rect">
-            <a:avLst/>
-          </a:prstGeom>
-          <a:solidFill>
-            <a:srgbClr val="F4F2ED"/>
-          </a:solidFill>
-          <a:ln/>
-        </p:spPr>
-      </p:sp>
-      <p:sp>
-        <p:nvSpPr>
-          <p:cNvPr id="60" name="Text 58"/>
-          <p:cNvSpPr/>
-          <p:nvPr/>
-        </p:nvSpPr>
-        <p:spPr>
-          <a:xfrm>
-            <a:off x="457200" y="4983480"/>
-            <a:ext cx="2057400" cy="548640"/>
-          </a:xfrm>
-          <a:prstGeom prst="rect">
-            <a:avLst/>
-          </a:prstGeom>
-          <a:noFill/>
-          <a:ln/>
-        </p:spPr>
-        <p:txBody>
-          <a:bodyPr wrap="square" lIns="25400" tIns="76200" rIns="76200" bIns="25400" rtlCol="0" anchor="ctr"/>
-          <a:lstStyle/>
-          <a:p>
-            <a:pPr algn="l" indent="0" marL="0">
-              <a:buNone/>
-            </a:pPr>
-            <a:r>
-              <a:rPr lang="en-US" sz="1000" b="1" dirty="0">
-                <a:solidFill>
-                  <a:srgbClr val="0B163C"/>
-                </a:solidFill>
-                <a:latin typeface="Montserrat" pitchFamily="34" charset="0"/>
-                <a:ea typeface="Montserrat" pitchFamily="34" charset="-122"/>
-                <a:cs typeface="Montserrat" pitchFamily="34" charset="-120"/>
-              </a:rPr>
-              <a:t>Commercial base</a:t>
-            </a:r>
-            <a:endParaRPr lang="en-US" sz="1000" dirty="0"/>
-          </a:p>
-        </p:txBody>
-      </p:sp>
-      <p:sp>
-        <p:nvSpPr>
-          <p:cNvPr id="61" name="Shape 59"/>
-          <p:cNvSpPr/>
-          <p:nvPr/>
-        </p:nvSpPr>
-        <p:spPr>
-          <a:xfrm>
-            <a:off x="2514600" y="4983480"/>
-            <a:ext cx="1691640" cy="548640"/>
-          </a:xfrm>
-          <a:prstGeom prst="rect">
-            <a:avLst/>
-          </a:prstGeom>
-          <a:solidFill>
-            <a:srgbClr val="F4F2ED"/>
-          </a:solidFill>
-          <a:ln/>
-        </p:spPr>
-      </p:sp>
-      <p:sp>
-        <p:nvSpPr>
-          <p:cNvPr id="62" name="Text 60"/>
-          <p:cNvSpPr/>
-          <p:nvPr/>
-        </p:nvSpPr>
-        <p:spPr>
-          <a:xfrm>
-            <a:off x="2514600" y="4983480"/>
-            <a:ext cx="1691640" cy="548640"/>
-          </a:xfrm>
-          <a:prstGeom prst="rect">
-            <a:avLst/>
-          </a:prstGeom>
-          <a:noFill/>
-          <a:ln/>
-        </p:spPr>
-        <p:txBody>
-          <a:bodyPr wrap="square" lIns="25400" tIns="76200" rIns="76200" bIns="25400" rtlCol="0" anchor="ctr"/>
-          <a:lstStyle/>
-          <a:p>
-            <a:pPr algn="l" indent="0" marL="0">
-              <a:buNone/>
-            </a:pPr>
-            <a:r>
-              <a:rPr lang="en-US" sz="950" dirty="0">
-                <a:solidFill>
-                  <a:srgbClr val="6B5A6B"/>
-                </a:solidFill>
-                <a:latin typeface="DM Sans" pitchFamily="34" charset="0"/>
-                <a:ea typeface="DM Sans" pitchFamily="34" charset="-122"/>
-                <a:cs typeface="DM Sans" pitchFamily="34" charset="-120"/>
-              </a:rPr>
-              <a:t>TX · NV · PA</a:t>
-            </a:r>
-            <a:endParaRPr lang="en-US" sz="950" dirty="0"/>
-          </a:p>
-        </p:txBody>
-      </p:sp>
-      <p:sp>
-        <p:nvSpPr>
-          <p:cNvPr id="63" name="Shape 61"/>
-          <p:cNvSpPr/>
-          <p:nvPr/>
-        </p:nvSpPr>
-        <p:spPr>
-          <a:xfrm>
-            <a:off x="4206240" y="4983480"/>
-            <a:ext cx="3246120" cy="548640"/>
-          </a:xfrm>
-          <a:prstGeom prst="rect">
-            <a:avLst/>
-          </a:prstGeom>
-          <a:solidFill>
-            <a:srgbClr val="F4F2ED"/>
-          </a:solidFill>
-          <a:ln/>
-        </p:spPr>
-      </p:sp>
-      <p:sp>
-        <p:nvSpPr>
-          <p:cNvPr id="64" name="Text 62"/>
-          <p:cNvSpPr/>
-          <p:nvPr/>
-        </p:nvSpPr>
-        <p:spPr>
-          <a:xfrm>
-            <a:off x="4206240" y="4983480"/>
-            <a:ext cx="3246120" cy="548640"/>
-          </a:xfrm>
-          <a:prstGeom prst="rect">
-            <a:avLst/>
-          </a:prstGeom>
-          <a:noFill/>
-          <a:ln/>
-        </p:spPr>
-        <p:txBody>
-          <a:bodyPr wrap="square" lIns="25400" tIns="76200" rIns="76200" bIns="25400" rtlCol="0" anchor="ctr"/>
-          <a:lstStyle/>
-          <a:p>
-            <a:pPr algn="l" indent="0" marL="0">
-              <a:buNone/>
-            </a:pPr>
-            <a:r>
-              <a:rPr lang="en-US" sz="950" dirty="0">
-                <a:solidFill>
-                  <a:srgbClr val="0B163C"/>
-                </a:solidFill>
-                <a:latin typeface="DM Sans" pitchFamily="34" charset="0"/>
-                <a:ea typeface="DM Sans" pitchFamily="34" charset="-122"/>
-                <a:cs typeface="DM Sans" pitchFamily="34" charset="-120"/>
-              </a:rPr>
-              <a:t>~1.5M SF incl. Lockheed Martin (Arlington)</a:t>
-            </a:r>
-            <a:endParaRPr lang="en-US" sz="950" dirty="0"/>
-          </a:p>
-        </p:txBody>
-      </p:sp>
-      <p:sp>
-        <p:nvSpPr>
-          <p:cNvPr id="65" name="Shape 63"/>
-          <p:cNvSpPr/>
-          <p:nvPr/>
-        </p:nvSpPr>
-        <p:spPr>
-          <a:xfrm>
-            <a:off x="7452360" y="4983480"/>
-            <a:ext cx="4279392" cy="548640"/>
-          </a:xfrm>
-          <a:prstGeom prst="rect">
-            <a:avLst/>
-          </a:prstGeom>
-          <a:solidFill>
-            <a:srgbClr val="F4F2ED"/>
-          </a:solidFill>
-          <a:ln/>
-        </p:spPr>
-      </p:sp>
-      <p:sp>
-        <p:nvSpPr>
-          <p:cNvPr id="66" name="Text 64"/>
-          <p:cNvSpPr/>
-          <p:nvPr/>
-        </p:nvSpPr>
-        <p:spPr>
-          <a:xfrm>
-            <a:off x="7452360" y="4983480"/>
-            <a:ext cx="4279392" cy="548640"/>
-          </a:xfrm>
-          <a:prstGeom prst="rect">
-            <a:avLst/>
-          </a:prstGeom>
-          <a:noFill/>
-          <a:ln/>
-        </p:spPr>
-        <p:txBody>
-          <a:bodyPr wrap="square" lIns="25400" tIns="76200" rIns="76200" bIns="25400" rtlCol="0" anchor="ctr"/>
-          <a:lstStyle/>
-          <a:p>
-            <a:pPr algn="l" indent="0" marL="0">
-              <a:lnSpc>
-                <a:spcPts val="1100"/>
-              </a:lnSpc>
-              <a:buNone/>
-            </a:pPr>
-            <a:r>
-              <a:rPr lang="en-US" sz="950" dirty="0">
-                <a:solidFill>
-                  <a:srgbClr val="0B163C"/>
-                </a:solidFill>
-                <a:latin typeface="DM Sans" pitchFamily="34" charset="0"/>
-                <a:ea typeface="DM Sans" pitchFamily="34" charset="-122"/>
-                <a:cs typeface="DM Sans" pitchFamily="34" charset="-120"/>
-              </a:rPr>
-              <a:t>Stabilized cash flow + collateral base for development debt</a:t>
-            </a:r>
-            <a:endParaRPr lang="en-US" sz="950" dirty="0"/>
-          </a:p>
-        </p:txBody>
-      </p:sp>
-      <p:sp>
-        <p:nvSpPr>
-          <p:cNvPr id="67" name="Shape 65"/>
-          <p:cNvSpPr/>
-          <p:nvPr/>
-        </p:nvSpPr>
-        <p:spPr>
-          <a:xfrm>
-            <a:off x="457200" y="5943600"/>
-            <a:ext cx="11274552" cy="420624"/>
-          </a:xfrm>
-          <a:prstGeom prst="rect">
-            <a:avLst/>
-          </a:prstGeom>
-          <a:solidFill>
-            <a:srgbClr val="3A243A"/>
-          </a:solidFill>
-          <a:ln/>
-        </p:spPr>
-      </p:sp>
-      <p:sp>
-        <p:nvSpPr>
-          <p:cNvPr id="68" name="Text 66"/>
-          <p:cNvSpPr/>
-          <p:nvPr/>
-        </p:nvSpPr>
-        <p:spPr>
-          <a:xfrm>
-            <a:off x="640080" y="5943600"/>
-            <a:ext cx="10908792" cy="420624"/>
-          </a:xfrm>
-          <a:prstGeom prst="rect">
-            <a:avLst/>
-          </a:prstGeom>
-          <a:noFill/>
-          <a:ln/>
-        </p:spPr>
-        <p:txBody>
-          <a:bodyPr wrap="square" lIns="0" tIns="0" rIns="0" bIns="0" rtlCol="0" anchor="ctr"/>
-          <a:lstStyle/>
-          <a:p>
-            <a:pPr algn="ctr" indent="0" marL="0">
-              <a:buNone/>
-            </a:pPr>
-            <a:r>
-              <a:rPr lang="en-US" sz="1100" b="1" dirty="0">
-                <a:solidFill>
-                  <a:srgbClr val="FFFFFF"/>
-                </a:solidFill>
-                <a:latin typeface="DM Sans" pitchFamily="34" charset="0"/>
-                <a:ea typeface="DM Sans" pitchFamily="34" charset="-122"/>
-                <a:cs typeface="DM Sans" pitchFamily="34" charset="-120"/>
-              </a:rPr>
-              <a:t>We start where capital-light wins are fastest — entitle, sell to a homebuilder, recycle proceeds into the next parcel.</a:t>
+              <a:t>Start at Queenstown — the largest parcel, closest to D.C. — then repeat the template course by course.</a:t>
             </a:r>
             <a:endParaRPr lang="en-US" sz="1100" dirty="0"/>
           </a:p>
@@ -12455,7 +11998,7 @@
                 <a:ea typeface="Montserrat" pitchFamily="34" charset="-122"/>
                 <a:cs typeface="Montserrat" pitchFamily="34" charset="-120"/>
               </a:rPr>
-              <a:t>Four levers that turn land into cash flow.</a:t>
+              <a:t>Four moves that turn land into cash.</a:t>
             </a:r>
             <a:endParaRPr lang="en-US" sz="2500" dirty="0"/>
           </a:p>
@@ -12497,7 +12040,7 @@
                 <a:ea typeface="DM Sans" pitchFamily="34" charset="-122"/>
                 <a:cs typeface="DM Sans" pitchFamily="34" charset="-120"/>
               </a:rPr>
-              <a:t>Sequenced to be capital-light first — generate proceeds early, then recycle into the heavier hospitality build-out.</a:t>
+              <a:t>Capital-light by sequence — soft costs first, then builders carry the infrastructure and the construction risk, and the proceeds recycle into the next course.</a:t>
             </a:r>
             <a:endParaRPr lang="en-US" sz="1300" dirty="0"/>
           </a:p>
@@ -12615,7 +12158,7 @@
                 <a:ea typeface="Montserrat" pitchFamily="34" charset="-122"/>
                 <a:cs typeface="Montserrat" pitchFamily="34" charset="-120"/>
               </a:rPr>
-              <a:t>Entitle &amp; Sell</a:t>
+              <a:t>Entitle</a:t>
             </a:r>
             <a:endParaRPr lang="en-US" sz="1500" dirty="0"/>
           </a:p>
@@ -12654,7 +12197,7 @@
                 <a:ea typeface="Montserrat" pitchFamily="34" charset="-122"/>
                 <a:cs typeface="Montserrat" pitchFamily="34" charset="-120"/>
               </a:rPr>
-              <a:t>Lots → homebuilders</a:t>
+              <a:t>Approvals for lots</a:t>
             </a:r>
             <a:endParaRPr lang="en-US" sz="1000" dirty="0"/>
           </a:p>
@@ -12716,7 +12259,7 @@
                 <a:ea typeface="DM Sans" pitchFamily="34" charset="-122"/>
                 <a:cs typeface="DM Sans" pitchFamily="34" charset="-120"/>
               </a:rPr>
-              <a:t>Secure approvals, sell finished lots, and let the builder fund the horizontal infrastructure — sewer, roads, utilities.</a:t>
+              <a:t>Secure zoning and subdivision approvals for the developable acreage around the fairways.</a:t>
             </a:r>
             <a:endParaRPr lang="en-US" sz="1050" dirty="0"/>
           </a:p>
@@ -12834,7 +12377,7 @@
                 <a:ea typeface="Montserrat" pitchFamily="34" charset="-122"/>
                 <a:cs typeface="Montserrat" pitchFamily="34" charset="-120"/>
               </a:rPr>
-              <a:t>Expand Keys</a:t>
+              <a:t>Sell to Builders</a:t>
             </a:r>
             <a:endParaRPr lang="en-US" sz="1500" dirty="0"/>
           </a:p>
@@ -12873,7 +12416,7 @@
                 <a:ea typeface="Montserrat" pitchFamily="34" charset="-122"/>
                 <a:cs typeface="Montserrat" pitchFamily="34" charset="-120"/>
               </a:rPr>
-              <a:t>Capture the overflow</a:t>
+              <a:t>Finished lots → homebuilders</a:t>
             </a:r>
             <a:endParaRPr lang="en-US" sz="1000" dirty="0"/>
           </a:p>
@@ -12935,7 +12478,7 @@
                 <a:ea typeface="DM Sans" pitchFamily="34" charset="-122"/>
                 <a:cs typeface="DM Sans" pitchFamily="34" charset="-120"/>
               </a:rPr>
-              <a:t>Add hotel rooms where demand is already being turned away. Convert lost referrals into owned, recurring revenue.</a:t>
+              <a:t>Sell entitled lots to regional builders and let them fund sewer, roads and utilities.</a:t>
             </a:r>
             <a:endParaRPr lang="en-US" sz="1050" dirty="0"/>
           </a:p>
@@ -13053,7 +12596,7 @@
                 <a:ea typeface="Montserrat" pitchFamily="34" charset="-122"/>
                 <a:cs typeface="Montserrat" pitchFamily="34" charset="-120"/>
               </a:rPr>
-              <a:t>Destination Build</a:t>
+              <a:t>Golf Premium</a:t>
             </a:r>
             <a:endParaRPr lang="en-US" sz="1500" dirty="0"/>
           </a:p>
@@ -13092,7 +12635,7 @@
                 <a:ea typeface="Montserrat" pitchFamily="34" charset="-122"/>
                 <a:cs typeface="Montserrat" pitchFamily="34" charset="-120"/>
               </a:rPr>
-              <a:t>Amenitize to lift value</a:t>
+              <a:t>Frontage sells higher</a:t>
             </a:r>
             <a:endParaRPr lang="en-US" sz="1000" dirty="0"/>
           </a:p>
@@ -13154,7 +12697,7 @@
                 <a:ea typeface="DM Sans" pitchFamily="34" charset="-122"/>
                 <a:cs typeface="DM Sans" pitchFamily="34" charset="-120"/>
               </a:rPr>
-              <a:t>Replicate the winery-to-destination template — F&amp;B, events, experiential — to raise both land and room values.</a:t>
+              <a:t>Lots on or near a course command a premium and absorb faster than a comparable raw subdivision.</a:t>
             </a:r>
             <a:endParaRPr lang="en-US" sz="1050" dirty="0"/>
           </a:p>
@@ -13272,7 +12815,7 @@
                 <a:ea typeface="Montserrat" pitchFamily="34" charset="-122"/>
                 <a:cs typeface="Montserrat" pitchFamily="34" charset="-120"/>
               </a:rPr>
-              <a:t>Recycle &amp; Scale</a:t>
+              <a:t>Recycle &amp; Repeat</a:t>
             </a:r>
             <a:endParaRPr lang="en-US" sz="1500" dirty="0"/>
           </a:p>
@@ -13311,7 +12854,7 @@
                 <a:ea typeface="Montserrat" pitchFamily="34" charset="-122"/>
                 <a:cs typeface="Montserrat" pitchFamily="34" charset="-120"/>
               </a:rPr>
-              <a:t>Proceeds → next parcel</a:t>
+              <a:t>Course by course</a:t>
             </a:r>
             <a:endParaRPr lang="en-US" sz="1000" dirty="0"/>
           </a:p>
@@ -13373,7 +12916,7 @@
                 <a:ea typeface="DM Sans" pitchFamily="34" charset="-122"/>
                 <a:cs typeface="DM Sans" pitchFamily="34" charset="-120"/>
               </a:rPr>
-              <a:t>Roll lot-sale and refinancing proceeds into the next property; compound the playbook across the portfolio.</a:t>
+              <a:t>Roll proceeds into the next course's land bank — and seed the broader Accountable Equity program.</a:t>
             </a:r>
             <a:endParaRPr lang="en-US" sz="1050" dirty="0"/>
           </a:p>
@@ -13432,7 +12975,7 @@
                 <a:ea typeface="DM Sans" pitchFamily="34" charset="-122"/>
                 <a:cs typeface="DM Sans" pitchFamily="34" charset="-120"/>
               </a:rPr>
-              <a:t>Lever 01 needs mostly soft costs — the fastest path to proof, and to first cash.</a:t>
+              <a:t>Move 01 is mostly soft costs — the fastest path to proof, and to first cash.</a:t>
             </a:r>
             <a:endParaRPr lang="en-US" sz="1100" dirty="0"/>
           </a:p>
@@ -13699,7 +13242,7 @@
                 <a:ea typeface="Montserrat" pitchFamily="34" charset="-122"/>
                 <a:cs typeface="Montserrat" pitchFamily="34" charset="-120"/>
               </a:rPr>
-              <a:t>FLAGSHIP ASSET</a:t>
+              <a:t>FLAGSHIP PARCEL</a:t>
             </a:r>
             <a:endParaRPr lang="en-US" sz="1000" dirty="0"/>
           </a:p>
@@ -13780,7 +13323,7 @@
                 <a:ea typeface="DM Sans" pitchFamily="34" charset="-122"/>
                 <a:cs typeface="DM Sans" pitchFamily="34" charset="-120"/>
               </a:rPr>
-              <a:t>The anchor of the program: an established 36-hole destination with developable land around the courses and drive-to demand from Annapolis, Baltimore &amp; Washington.</a:t>
+              <a:t>The anchor of the land bank: an established 36-hole destination with developable acreage around the courses and drive-to demand from Annapolis, Baltimore &amp; Washington.</a:t>
             </a:r>
             <a:endParaRPr lang="en-US" sz="1300" dirty="0"/>
           </a:p>
@@ -14511,7 +14054,7 @@
                 <a:ea typeface="DM Sans" pitchFamily="34" charset="-122"/>
                 <a:cs typeface="DM Sans" pitchFamily="34" charset="-120"/>
               </a:rPr>
-              <a:t>Let the builder fund sewer, roads and horizontal infrastructure — we keep the upside, not the burden.</a:t>
+              <a:t>Let the builder fund sewer, roads and infrastructure — we keep the upside, not the burden.</a:t>
             </a:r>
             <a:endParaRPr lang="en-US" sz="1000" dirty="0"/>
           </a:p>
@@ -14553,7 +14096,7 @@
                 <a:ea typeface="DM Sans" pitchFamily="34" charset="-122"/>
                 <a:cs typeface="DM Sans" pitchFamily="34" charset="-120"/>
               </a:rPr>
-              <a:t>Add hotel keys to capture the overflow the resort turns away today.</a:t>
+              <a:t>Golf-frontage lots near Annapolis &amp; D.C. command a premium and absorb quickly.</a:t>
             </a:r>
             <a:endParaRPr lang="en-US" sz="1000" dirty="0"/>
           </a:p>
@@ -14595,7 +14138,7 @@
                 <a:ea typeface="DM Sans" pitchFamily="34" charset="-122"/>
                 <a:cs typeface="DM Sans" pitchFamily="34" charset="-120"/>
               </a:rPr>
-              <a:t>Premium private-retreat demand is real — a recent week-long corporate buyout signals pricing power.</a:t>
+              <a:t>Location pull is real — a recent week-long corporate buyout signals premium demand for the setting.</a:t>
             </a:r>
             <a:endParaRPr lang="en-US" sz="1000" dirty="0"/>
           </a:p>
@@ -16283,7 +15826,7 @@
                 <a:ea typeface="DM Sans" pitchFamily="34" charset="-122"/>
                 <a:cs typeface="DM Sans" pitchFamily="34" charset="-120"/>
               </a:rPr>
-              <a:t>before hotel-key upside</a:t>
+              <a:t>Queenstown alone</a:t>
             </a:r>
             <a:endParaRPr lang="en-US" sz="1000" dirty="0"/>
           </a:p>
@@ -16449,7 +15992,7 @@
                 <a:ea typeface="Montserrat" pitchFamily="34" charset="-122"/>
                 <a:cs typeface="Montserrat" pitchFamily="34" charset="-120"/>
               </a:rPr>
-              <a:t>≈ $29M net lot proceeds — before any hotel-key or destination upside — and recyclable into the next parcel.</a:t>
+              <a:t>≈ $29M net proceeds from Queenstown lots alone — recyclable into LBI National and the next course.</a:t>
             </a:r>
             <a:endParaRPr lang="en-US" sz="1200" dirty="0"/>
           </a:p>
@@ -16716,7 +16259,7 @@
                 <a:ea typeface="Montserrat" pitchFamily="34" charset="-122"/>
                 <a:cs typeface="Montserrat" pitchFamily="34" charset="-120"/>
               </a:rPr>
-              <a:t>THE MATH  ·  ILLUSTRATIVE</a:t>
+              <a:t>WHY IT SELLS</a:t>
             </a:r>
             <a:endParaRPr lang="en-US" sz="1000" dirty="0"/>
           </a:p>
@@ -16755,7 +16298,7 @@
                 <a:ea typeface="Montserrat" pitchFamily="34" charset="-122"/>
                 <a:cs typeface="Montserrat" pitchFamily="34" charset="-120"/>
               </a:rPr>
-              <a:t>Turned-away guests → owned revenue.</a:t>
+              <a:t>Golf-course lots sell — here's why.</a:t>
             </a:r>
             <a:endParaRPr lang="en-US" sz="2500" dirty="0"/>
           </a:p>
@@ -16797,7 +16340,7 @@
                 <a:ea typeface="DM Sans" pitchFamily="34" charset="-122"/>
                 <a:cs typeface="DM Sans" pitchFamily="34" charset="-120"/>
               </a:rPr>
-              <a:t>The resort is sending business to other hotels today. Even a modest key expansion converts referrals into NOI. Illustrative — calibrate with your occupancy and turn-away logs.</a:t>
+              <a:t>Course frontage, drive-to metro demand and builder appetite for entitled lots all push price and absorption. We're meeting demand that already exists.</a:t>
             </a:r>
             <a:endParaRPr lang="en-US" sz="1300" dirty="0"/>
           </a:p>
@@ -16871,7 +16414,7 @@
         <p:spPr>
           <a:xfrm>
             <a:off x="3200400" y="1965960"/>
-            <a:ext cx="2743200" cy="365760"/>
+            <a:ext cx="4389120" cy="365760"/>
           </a:xfrm>
           <a:prstGeom prst="rect">
             <a:avLst/>
@@ -16891,7 +16434,7 @@
         <p:spPr>
           <a:xfrm>
             <a:off x="3200400" y="1965960"/>
-            <a:ext cx="2743200" cy="365760"/>
+            <a:ext cx="4389120" cy="365760"/>
           </a:xfrm>
           <a:prstGeom prst="rect">
             <a:avLst/>
@@ -16915,7 +16458,7 @@
                 <a:ea typeface="Montserrat" pitchFamily="34" charset="-122"/>
                 <a:cs typeface="Montserrat" pitchFamily="34" charset="-120"/>
               </a:rPr>
-              <a:t>Assumption</a:t>
+              <a:t>Detail</a:t>
             </a:r>
             <a:endParaRPr lang="en-US" sz="900" dirty="0"/>
           </a:p>
@@ -16929,8 +16472,8 @@
         </p:nvSpPr>
         <p:spPr>
           <a:xfrm>
-            <a:off x="5943600" y="1965960"/>
-            <a:ext cx="3017520" cy="365760"/>
+            <a:off x="7589520" y="1965960"/>
+            <a:ext cx="4142232" cy="365760"/>
           </a:xfrm>
           <a:prstGeom prst="rect">
             <a:avLst/>
@@ -16949,8 +16492,8 @@
         </p:nvSpPr>
         <p:spPr>
           <a:xfrm>
-            <a:off x="5943600" y="1965960"/>
-            <a:ext cx="3017520" cy="365760"/>
+            <a:off x="7589520" y="1965960"/>
+            <a:ext cx="4142232" cy="365760"/>
           </a:xfrm>
           <a:prstGeom prst="rect">
             <a:avLst/>
@@ -16974,7 +16517,7 @@
                 <a:ea typeface="Montserrat" pitchFamily="34" charset="-122"/>
                 <a:cs typeface="Montserrat" pitchFamily="34" charset="-120"/>
               </a:rPr>
-              <a:t>Calculation</a:t>
+              <a:t>Why it lifts value</a:t>
             </a:r>
             <a:endParaRPr lang="en-US" sz="900" dirty="0"/>
           </a:p>
@@ -16988,14 +16531,14 @@
         </p:nvSpPr>
         <p:spPr>
           <a:xfrm>
-            <a:off x="8961120" y="1965960"/>
-            <a:ext cx="2743200" cy="365760"/>
-          </a:xfrm>
-          <a:prstGeom prst="rect">
-            <a:avLst/>
-          </a:prstGeom>
-          <a:solidFill>
-            <a:srgbClr val="0B163C"/>
+            <a:off x="457200" y="2331720"/>
+            <a:ext cx="2743200" cy="566928"/>
+          </a:xfrm>
+          <a:prstGeom prst="rect">
+            <a:avLst/>
+          </a:prstGeom>
+          <a:solidFill>
+            <a:srgbClr val="FFFFFF"/>
           </a:solidFill>
           <a:ln/>
         </p:spPr>
@@ -17008,8 +16551,8 @@
         </p:nvSpPr>
         <p:spPr>
           <a:xfrm>
-            <a:off x="8961120" y="1965960"/>
-            <a:ext cx="2743200" cy="365760"/>
+            <a:off x="457200" y="2331720"/>
+            <a:ext cx="2743200" cy="566928"/>
           </a:xfrm>
           <a:prstGeom prst="rect">
             <a:avLst/>
@@ -17021,21 +16564,21 @@
           <a:bodyPr wrap="square" lIns="25400" tIns="76200" rIns="76200" bIns="25400" rtlCol="0" anchor="ctr"/>
           <a:lstStyle/>
           <a:p>
-            <a:pPr algn="r" indent="0" marL="0">
-              <a:buNone/>
-            </a:pPr>
-            <a:r>
-              <a:rPr lang="en-US" sz="900" b="1" dirty="0">
-                <a:solidFill>
-                  <a:srgbClr val="FFFFFF"/>
+            <a:pPr algn="l" indent="0" marL="0">
+              <a:buNone/>
+            </a:pPr>
+            <a:r>
+              <a:rPr lang="en-US" sz="1050" b="1" dirty="0">
+                <a:solidFill>
+                  <a:srgbClr val="0B163C"/>
                 </a:solidFill>
                 <a:latin typeface="Montserrat" pitchFamily="34" charset="0"/>
                 <a:ea typeface="Montserrat" pitchFamily="34" charset="-122"/>
                 <a:cs typeface="Montserrat" pitchFamily="34" charset="-120"/>
               </a:rPr>
-              <a:t>= Result</a:t>
-            </a:r>
-            <a:endParaRPr lang="en-US" sz="900" dirty="0"/>
+              <a:t>Golf-course frontage</a:t>
+            </a:r>
+            <a:endParaRPr lang="en-US" sz="1050" dirty="0"/>
           </a:p>
         </p:txBody>
       </p:sp>
@@ -17047,8 +16590,8 @@
         </p:nvSpPr>
         <p:spPr>
           <a:xfrm>
-            <a:off x="457200" y="2331720"/>
-            <a:ext cx="2743200" cy="475488"/>
+            <a:off x="3200400" y="2331720"/>
+            <a:ext cx="4389120" cy="566928"/>
           </a:xfrm>
           <a:prstGeom prst="rect">
             <a:avLst/>
@@ -17067,8 +16610,8 @@
         </p:nvSpPr>
         <p:spPr>
           <a:xfrm>
-            <a:off x="457200" y="2331720"/>
-            <a:ext cx="2743200" cy="475488"/>
+            <a:off x="3200400" y="2331720"/>
+            <a:ext cx="4389120" cy="566928"/>
           </a:xfrm>
           <a:prstGeom prst="rect">
             <a:avLst/>
@@ -17081,10 +16624,134 @@
           <a:lstStyle/>
           <a:p>
             <a:pPr algn="l" indent="0" marL="0">
-              <a:buNone/>
-            </a:pPr>
-            <a:r>
-              <a:rPr lang="en-US" sz="1000" b="1" dirty="0">
+              <a:lnSpc>
+                <a:spcPts val="1100"/>
+              </a:lnSpc>
+              <a:buNone/>
+            </a:pPr>
+            <a:r>
+              <a:rPr lang="en-US" sz="950" dirty="0">
+                <a:solidFill>
+                  <a:srgbClr val="0B163C"/>
+                </a:solidFill>
+                <a:latin typeface="DM Sans" pitchFamily="34" charset="0"/>
+                <a:ea typeface="DM Sans" pitchFamily="34" charset="-122"/>
+                <a:cs typeface="DM Sans" pitchFamily="34" charset="-120"/>
+              </a:rPr>
+              <a:t>Lots on or adjacent to an established course</a:t>
+            </a:r>
+            <a:endParaRPr lang="en-US" sz="950" dirty="0"/>
+          </a:p>
+        </p:txBody>
+      </p:sp>
+      <p:sp>
+        <p:nvSpPr>
+          <p:cNvPr id="21" name="Shape 19"/>
+          <p:cNvSpPr/>
+          <p:nvPr/>
+        </p:nvSpPr>
+        <p:spPr>
+          <a:xfrm>
+            <a:off x="7589520" y="2331720"/>
+            <a:ext cx="4142232" cy="566928"/>
+          </a:xfrm>
+          <a:prstGeom prst="rect">
+            <a:avLst/>
+          </a:prstGeom>
+          <a:solidFill>
+            <a:srgbClr val="FFFFFF"/>
+          </a:solidFill>
+          <a:ln/>
+        </p:spPr>
+      </p:sp>
+      <p:sp>
+        <p:nvSpPr>
+          <p:cNvPr id="22" name="Text 20"/>
+          <p:cNvSpPr/>
+          <p:nvPr/>
+        </p:nvSpPr>
+        <p:spPr>
+          <a:xfrm>
+            <a:off x="7589520" y="2331720"/>
+            <a:ext cx="4142232" cy="566928"/>
+          </a:xfrm>
+          <a:prstGeom prst="rect">
+            <a:avLst/>
+          </a:prstGeom>
+          <a:noFill/>
+          <a:ln/>
+        </p:spPr>
+        <p:txBody>
+          <a:bodyPr wrap="square" lIns="25400" tIns="76200" rIns="76200" bIns="25400" rtlCol="0" anchor="ctr"/>
+          <a:lstStyle/>
+          <a:p>
+            <a:pPr algn="l" indent="0" marL="0">
+              <a:lnSpc>
+                <a:spcPts val="1100"/>
+              </a:lnSpc>
+              <a:buNone/>
+            </a:pPr>
+            <a:r>
+              <a:rPr lang="en-US" sz="950" dirty="0">
+                <a:solidFill>
+                  <a:srgbClr val="6B5A6B"/>
+                </a:solidFill>
+                <a:latin typeface="DM Sans" pitchFamily="34" charset="0"/>
+                <a:ea typeface="DM Sans" pitchFamily="34" charset="-122"/>
+                <a:cs typeface="DM Sans" pitchFamily="34" charset="-120"/>
+              </a:rPr>
+              <a:t>Premium pricing and faster absorption vs. a raw subdivision</a:t>
+            </a:r>
+            <a:endParaRPr lang="en-US" sz="950" dirty="0"/>
+          </a:p>
+        </p:txBody>
+      </p:sp>
+      <p:sp>
+        <p:nvSpPr>
+          <p:cNvPr id="23" name="Shape 21"/>
+          <p:cNvSpPr/>
+          <p:nvPr/>
+        </p:nvSpPr>
+        <p:spPr>
+          <a:xfrm>
+            <a:off x="457200" y="2898648"/>
+            <a:ext cx="2743200" cy="566928"/>
+          </a:xfrm>
+          <a:prstGeom prst="rect">
+            <a:avLst/>
+          </a:prstGeom>
+          <a:solidFill>
+            <a:srgbClr val="F4F2ED"/>
+          </a:solidFill>
+          <a:ln/>
+        </p:spPr>
+      </p:sp>
+      <p:sp>
+        <p:nvSpPr>
+          <p:cNvPr id="24" name="Text 22"/>
+          <p:cNvSpPr/>
+          <p:nvPr/>
+        </p:nvSpPr>
+        <p:spPr>
+          <a:xfrm>
+            <a:off x="457200" y="2898648"/>
+            <a:ext cx="2743200" cy="566928"/>
+          </a:xfrm>
+          <a:prstGeom prst="rect">
+            <a:avLst/>
+          </a:prstGeom>
+          <a:noFill/>
+          <a:ln/>
+        </p:spPr>
+        <p:txBody>
+          <a:bodyPr wrap="square" lIns="25400" tIns="76200" rIns="76200" bIns="25400" rtlCol="0" anchor="ctr"/>
+          <a:lstStyle/>
+          <a:p>
+            <a:pPr algn="l" indent="0" marL="0">
+              <a:buNone/>
+            </a:pPr>
+            <a:r>
+              <a:rPr lang="en-US" sz="1050" b="1" dirty="0">
                 <a:solidFill>
                   <a:srgbClr val="0B163C"/>
                 </a:solidFill>
@@ -17092,42 +16759,42 @@
                 <a:ea typeface="Montserrat" pitchFamily="34" charset="-122"/>
                 <a:cs typeface="Montserrat" pitchFamily="34" charset="-120"/>
               </a:rPr>
-              <a:t>New keys added</a:t>
-            </a:r>
-            <a:endParaRPr lang="en-US" sz="1000" dirty="0"/>
-          </a:p>
-        </p:txBody>
-      </p:sp>
-      <p:sp>
-        <p:nvSpPr>
-          <p:cNvPr id="21" name="Shape 19"/>
-          <p:cNvSpPr/>
-          <p:nvPr/>
-        </p:nvSpPr>
-        <p:spPr>
-          <a:xfrm>
-            <a:off x="3200400" y="2331720"/>
-            <a:ext cx="2743200" cy="475488"/>
-          </a:xfrm>
-          <a:prstGeom prst="rect">
-            <a:avLst/>
-          </a:prstGeom>
-          <a:solidFill>
-            <a:srgbClr val="FFFFFF"/>
-          </a:solidFill>
-          <a:ln/>
-        </p:spPr>
-      </p:sp>
-      <p:sp>
-        <p:nvSpPr>
-          <p:cNvPr id="22" name="Text 20"/>
-          <p:cNvSpPr/>
-          <p:nvPr/>
-        </p:nvSpPr>
-        <p:spPr>
-          <a:xfrm>
-            <a:off x="3200400" y="2331720"/>
-            <a:ext cx="2743200" cy="475488"/>
+              <a:t>Queenstown location</a:t>
+            </a:r>
+            <a:endParaRPr lang="en-US" sz="1050" dirty="0"/>
+          </a:p>
+        </p:txBody>
+      </p:sp>
+      <p:sp>
+        <p:nvSpPr>
+          <p:cNvPr id="25" name="Shape 23"/>
+          <p:cNvSpPr/>
+          <p:nvPr/>
+        </p:nvSpPr>
+        <p:spPr>
+          <a:xfrm>
+            <a:off x="3200400" y="2898648"/>
+            <a:ext cx="4389120" cy="566928"/>
+          </a:xfrm>
+          <a:prstGeom prst="rect">
+            <a:avLst/>
+          </a:prstGeom>
+          <a:solidFill>
+            <a:srgbClr val="F4F2ED"/>
+          </a:solidFill>
+          <a:ln/>
+        </p:spPr>
+      </p:sp>
+      <p:sp>
+        <p:nvSpPr>
+          <p:cNvPr id="26" name="Text 24"/>
+          <p:cNvSpPr/>
+          <p:nvPr/>
+        </p:nvSpPr>
+        <p:spPr>
+          <a:xfrm>
+            <a:off x="3200400" y="2898648"/>
+            <a:ext cx="4389120" cy="566928"/>
           </a:xfrm>
           <a:prstGeom prst="rect">
             <a:avLst/>
@@ -17140,10 +16807,13 @@
           <a:lstStyle/>
           <a:p>
             <a:pPr algn="l" indent="0" marL="0">
-              <a:buNone/>
-            </a:pPr>
-            <a:r>
-              <a:rPr lang="en-US" sz="1000" dirty="0">
+              <a:lnSpc>
+                <a:spcPts val="1100"/>
+              </a:lnSpc>
+              <a:buNone/>
+            </a:pPr>
+            <a:r>
+              <a:rPr lang="en-US" sz="950" dirty="0">
                 <a:solidFill>
                   <a:srgbClr val="0B163C"/>
                 </a:solidFill>
@@ -17151,42 +16821,42 @@
                 <a:ea typeface="DM Sans" pitchFamily="34" charset="-122"/>
                 <a:cs typeface="DM Sans" pitchFamily="34" charset="-120"/>
               </a:rPr>
-              <a:t>120 rooms</a:t>
-            </a:r>
-            <a:endParaRPr lang="en-US" sz="1000" dirty="0"/>
-          </a:p>
-        </p:txBody>
-      </p:sp>
-      <p:sp>
-        <p:nvSpPr>
-          <p:cNvPr id="23" name="Shape 21"/>
-          <p:cNvSpPr/>
-          <p:nvPr/>
-        </p:nvSpPr>
-        <p:spPr>
-          <a:xfrm>
-            <a:off x="5943600" y="2331720"/>
-            <a:ext cx="3017520" cy="475488"/>
-          </a:xfrm>
-          <a:prstGeom prst="rect">
-            <a:avLst/>
-          </a:prstGeom>
-          <a:solidFill>
-            <a:srgbClr val="FFFFFF"/>
-          </a:solidFill>
-          <a:ln/>
-        </p:spPr>
-      </p:sp>
-      <p:sp>
-        <p:nvSpPr>
-          <p:cNvPr id="24" name="Text 22"/>
-          <p:cNvSpPr/>
-          <p:nvPr/>
-        </p:nvSpPr>
-        <p:spPr>
-          <a:xfrm>
-            <a:off x="5943600" y="2331720"/>
-            <a:ext cx="3017520" cy="475488"/>
+              <a:t>~45 min to Annapolis; ~90 to D.C. &amp; Baltimore</a:t>
+            </a:r>
+            <a:endParaRPr lang="en-US" sz="950" dirty="0"/>
+          </a:p>
+        </p:txBody>
+      </p:sp>
+      <p:sp>
+        <p:nvSpPr>
+          <p:cNvPr id="27" name="Shape 25"/>
+          <p:cNvSpPr/>
+          <p:nvPr/>
+        </p:nvSpPr>
+        <p:spPr>
+          <a:xfrm>
+            <a:off x="7589520" y="2898648"/>
+            <a:ext cx="4142232" cy="566928"/>
+          </a:xfrm>
+          <a:prstGeom prst="rect">
+            <a:avLst/>
+          </a:prstGeom>
+          <a:solidFill>
+            <a:srgbClr val="F4F2ED"/>
+          </a:solidFill>
+          <a:ln/>
+        </p:spPr>
+      </p:sp>
+      <p:sp>
+        <p:nvSpPr>
+          <p:cNvPr id="28" name="Text 26"/>
+          <p:cNvSpPr/>
+          <p:nvPr/>
+        </p:nvSpPr>
+        <p:spPr>
+          <a:xfrm>
+            <a:off x="7589520" y="2898648"/>
+            <a:ext cx="4142232" cy="566928"/>
           </a:xfrm>
           <a:prstGeom prst="rect">
             <a:avLst/>
@@ -17199,10 +16869,13 @@
           <a:lstStyle/>
           <a:p>
             <a:pPr algn="l" indent="0" marL="0">
-              <a:buNone/>
-            </a:pPr>
-            <a:r>
-              <a:rPr lang="en-US" sz="900" dirty="0">
+              <a:lnSpc>
+                <a:spcPts val="1100"/>
+              </a:lnSpc>
+              <a:buNone/>
+            </a:pPr>
+            <a:r>
+              <a:rPr lang="en-US" sz="950" dirty="0">
                 <a:solidFill>
                   <a:srgbClr val="6B5A6B"/>
                 </a:solidFill>
@@ -17210,22 +16883,22 @@
                 <a:ea typeface="DM Sans" pitchFamily="34" charset="-122"/>
                 <a:cs typeface="DM Sans" pitchFamily="34" charset="-120"/>
               </a:rPr>
-              <a:t>—</a:t>
-            </a:r>
-            <a:endParaRPr lang="en-US" sz="900" dirty="0"/>
-          </a:p>
-        </p:txBody>
-      </p:sp>
-      <p:sp>
-        <p:nvSpPr>
-          <p:cNvPr id="25" name="Shape 23"/>
-          <p:cNvSpPr/>
-          <p:nvPr/>
-        </p:nvSpPr>
-        <p:spPr>
-          <a:xfrm>
-            <a:off x="8961120" y="2331720"/>
-            <a:ext cx="2743200" cy="475488"/>
+              <a:t>Commuter + second-home demand from three metros</a:t>
+            </a:r>
+            <a:endParaRPr lang="en-US" sz="950" dirty="0"/>
+          </a:p>
+        </p:txBody>
+      </p:sp>
+      <p:sp>
+        <p:nvSpPr>
+          <p:cNvPr id="29" name="Shape 27"/>
+          <p:cNvSpPr/>
+          <p:nvPr/>
+        </p:nvSpPr>
+        <p:spPr>
+          <a:xfrm>
+            <a:off x="457200" y="3465576"/>
+            <a:ext cx="2743200" cy="566928"/>
           </a:xfrm>
           <a:prstGeom prst="rect">
             <a:avLst/>
@@ -17238,14 +16911,14 @@
       </p:sp>
       <p:sp>
         <p:nvSpPr>
-          <p:cNvPr id="26" name="Text 24"/>
-          <p:cNvSpPr/>
-          <p:nvPr/>
-        </p:nvSpPr>
-        <p:spPr>
-          <a:xfrm>
-            <a:off x="8961120" y="2331720"/>
-            <a:ext cx="2743200" cy="475488"/>
+          <p:cNvPr id="30" name="Text 28"/>
+          <p:cNvSpPr/>
+          <p:nvPr/>
+        </p:nvSpPr>
+        <p:spPr>
+          <a:xfrm>
+            <a:off x="457200" y="3465576"/>
+            <a:ext cx="2743200" cy="566928"/>
           </a:xfrm>
           <a:prstGeom prst="rect">
             <a:avLst/>
@@ -17257,34 +16930,158 @@
           <a:bodyPr wrap="square" lIns="25400" tIns="76200" rIns="76200" bIns="25400" rtlCol="0" anchor="ctr"/>
           <a:lstStyle/>
           <a:p>
-            <a:pPr algn="r" indent="0" marL="0">
-              <a:buNone/>
-            </a:pPr>
-            <a:r>
-              <a:rPr lang="en-US" sz="1100" b="1" dirty="0">
-                <a:solidFill>
-                  <a:srgbClr val="3A243A"/>
+            <a:pPr algn="l" indent="0" marL="0">
+              <a:buNone/>
+            </a:pPr>
+            <a:r>
+              <a:rPr lang="en-US" sz="1050" b="1" dirty="0">
+                <a:solidFill>
+                  <a:srgbClr val="0B163C"/>
                 </a:solidFill>
                 <a:latin typeface="Montserrat" pitchFamily="34" charset="0"/>
                 <a:ea typeface="Montserrat" pitchFamily="34" charset="-122"/>
                 <a:cs typeface="Montserrat" pitchFamily="34" charset="-120"/>
               </a:rPr>
-              <a:t>120 keys</a:t>
-            </a:r>
-            <a:endParaRPr lang="en-US" sz="1100" dirty="0"/>
-          </a:p>
-        </p:txBody>
-      </p:sp>
-      <p:sp>
-        <p:nvSpPr>
-          <p:cNvPr id="27" name="Shape 25"/>
-          <p:cNvSpPr/>
-          <p:nvPr/>
-        </p:nvSpPr>
-        <p:spPr>
-          <a:xfrm>
-            <a:off x="457200" y="2807208"/>
-            <a:ext cx="2743200" cy="475488"/>
+              <a:t>LBI National scarcity</a:t>
+            </a:r>
+            <a:endParaRPr lang="en-US" sz="1050" dirty="0"/>
+          </a:p>
+        </p:txBody>
+      </p:sp>
+      <p:sp>
+        <p:nvSpPr>
+          <p:cNvPr id="31" name="Shape 29"/>
+          <p:cNvSpPr/>
+          <p:nvPr/>
+        </p:nvSpPr>
+        <p:spPr>
+          <a:xfrm>
+            <a:off x="3200400" y="3465576"/>
+            <a:ext cx="4389120" cy="566928"/>
+          </a:xfrm>
+          <a:prstGeom prst="rect">
+            <a:avLst/>
+          </a:prstGeom>
+          <a:solidFill>
+            <a:srgbClr val="FFFFFF"/>
+          </a:solidFill>
+          <a:ln/>
+        </p:spPr>
+      </p:sp>
+      <p:sp>
+        <p:nvSpPr>
+          <p:cNvPr id="32" name="Text 30"/>
+          <p:cNvSpPr/>
+          <p:nvPr/>
+        </p:nvSpPr>
+        <p:spPr>
+          <a:xfrm>
+            <a:off x="3200400" y="3465576"/>
+            <a:ext cx="4389120" cy="566928"/>
+          </a:xfrm>
+          <a:prstGeom prst="rect">
+            <a:avLst/>
+          </a:prstGeom>
+          <a:noFill/>
+          <a:ln/>
+        </p:spPr>
+        <p:txBody>
+          <a:bodyPr wrap="square" lIns="25400" tIns="76200" rIns="76200" bIns="25400" rtlCol="0" anchor="ctr"/>
+          <a:lstStyle/>
+          <a:p>
+            <a:pPr algn="l" indent="0" marL="0">
+              <a:lnSpc>
+                <a:spcPts val="1100"/>
+              </a:lnSpc>
+              <a:buNone/>
+            </a:pPr>
+            <a:r>
+              <a:rPr lang="en-US" sz="950" dirty="0">
+                <a:solidFill>
+                  <a:srgbClr val="0B163C"/>
+                </a:solidFill>
+                <a:latin typeface="DM Sans" pitchFamily="34" charset="0"/>
+                <a:ea typeface="DM Sans" pitchFamily="34" charset="-122"/>
+                <a:cs typeface="DM Sans" pitchFamily="34" charset="-120"/>
+              </a:rPr>
+              <a:t>Limited developable land on the Jersey Shore</a:t>
+            </a:r>
+            <a:endParaRPr lang="en-US" sz="950" dirty="0"/>
+          </a:p>
+        </p:txBody>
+      </p:sp>
+      <p:sp>
+        <p:nvSpPr>
+          <p:cNvPr id="33" name="Shape 31"/>
+          <p:cNvSpPr/>
+          <p:nvPr/>
+        </p:nvSpPr>
+        <p:spPr>
+          <a:xfrm>
+            <a:off x="7589520" y="3465576"/>
+            <a:ext cx="4142232" cy="566928"/>
+          </a:xfrm>
+          <a:prstGeom prst="rect">
+            <a:avLst/>
+          </a:prstGeom>
+          <a:solidFill>
+            <a:srgbClr val="FFFFFF"/>
+          </a:solidFill>
+          <a:ln/>
+        </p:spPr>
+      </p:sp>
+      <p:sp>
+        <p:nvSpPr>
+          <p:cNvPr id="34" name="Text 32"/>
+          <p:cNvSpPr/>
+          <p:nvPr/>
+        </p:nvSpPr>
+        <p:spPr>
+          <a:xfrm>
+            <a:off x="7589520" y="3465576"/>
+            <a:ext cx="4142232" cy="566928"/>
+          </a:xfrm>
+          <a:prstGeom prst="rect">
+            <a:avLst/>
+          </a:prstGeom>
+          <a:noFill/>
+          <a:ln/>
+        </p:spPr>
+        <p:txBody>
+          <a:bodyPr wrap="square" lIns="25400" tIns="76200" rIns="76200" bIns="25400" rtlCol="0" anchor="ctr"/>
+          <a:lstStyle/>
+          <a:p>
+            <a:pPr algn="l" indent="0" marL="0">
+              <a:lnSpc>
+                <a:spcPts val="1100"/>
+              </a:lnSpc>
+              <a:buNone/>
+            </a:pPr>
+            <a:r>
+              <a:rPr lang="en-US" sz="950" dirty="0">
+                <a:solidFill>
+                  <a:srgbClr val="6B5A6B"/>
+                </a:solidFill>
+                <a:latin typeface="DM Sans" pitchFamily="34" charset="0"/>
+                <a:ea typeface="DM Sans" pitchFamily="34" charset="-122"/>
+                <a:cs typeface="DM Sans" pitchFamily="34" charset="-120"/>
+              </a:rPr>
+              <a:t>High barriers → durable, premium shore-market lot values</a:t>
+            </a:r>
+            <a:endParaRPr lang="en-US" sz="950" dirty="0"/>
+          </a:p>
+        </p:txBody>
+      </p:sp>
+      <p:sp>
+        <p:nvSpPr>
+          <p:cNvPr id="35" name="Shape 33"/>
+          <p:cNvSpPr/>
+          <p:nvPr/>
+        </p:nvSpPr>
+        <p:spPr>
+          <a:xfrm>
+            <a:off x="457200" y="4032504"/>
+            <a:ext cx="2743200" cy="566928"/>
           </a:xfrm>
           <a:prstGeom prst="rect">
             <a:avLst/>
@@ -17297,14 +17094,14 @@
       </p:sp>
       <p:sp>
         <p:nvSpPr>
-          <p:cNvPr id="28" name="Text 26"/>
-          <p:cNvSpPr/>
-          <p:nvPr/>
-        </p:nvSpPr>
-        <p:spPr>
-          <a:xfrm>
-            <a:off x="457200" y="2807208"/>
-            <a:ext cx="2743200" cy="475488"/>
+          <p:cNvPr id="36" name="Text 34"/>
+          <p:cNvSpPr/>
+          <p:nvPr/>
+        </p:nvSpPr>
+        <p:spPr>
+          <a:xfrm>
+            <a:off x="457200" y="4032504"/>
+            <a:ext cx="2743200" cy="566928"/>
           </a:xfrm>
           <a:prstGeom prst="rect">
             <a:avLst/>
@@ -17320,7 +17117,7 @@
               <a:buNone/>
             </a:pPr>
             <a:r>
-              <a:rPr lang="en-US" sz="1000" b="1" dirty="0">
+              <a:rPr lang="en-US" sz="1050" b="1" dirty="0">
                 <a:solidFill>
                   <a:srgbClr val="0B163C"/>
                 </a:solidFill>
@@ -17328,22 +17125,22 @@
                 <a:ea typeface="Montserrat" pitchFamily="34" charset="-122"/>
                 <a:cs typeface="Montserrat" pitchFamily="34" charset="-120"/>
               </a:rPr>
-              <a:t>Stabilized occupancy</a:t>
-            </a:r>
-            <a:endParaRPr lang="en-US" sz="1000" dirty="0"/>
-          </a:p>
-        </p:txBody>
-      </p:sp>
-      <p:sp>
-        <p:nvSpPr>
-          <p:cNvPr id="29" name="Shape 27"/>
-          <p:cNvSpPr/>
-          <p:nvPr/>
-        </p:nvSpPr>
-        <p:spPr>
-          <a:xfrm>
-            <a:off x="3200400" y="2807208"/>
-            <a:ext cx="2743200" cy="475488"/>
+              <a:t>Builder appetite</a:t>
+            </a:r>
+            <a:endParaRPr lang="en-US" sz="1050" dirty="0"/>
+          </a:p>
+        </p:txBody>
+      </p:sp>
+      <p:sp>
+        <p:nvSpPr>
+          <p:cNvPr id="37" name="Shape 35"/>
+          <p:cNvSpPr/>
+          <p:nvPr/>
+        </p:nvSpPr>
+        <p:spPr>
+          <a:xfrm>
+            <a:off x="3200400" y="4032504"/>
+            <a:ext cx="4389120" cy="566928"/>
           </a:xfrm>
           <a:prstGeom prst="rect">
             <a:avLst/>
@@ -17356,14 +17153,14 @@
       </p:sp>
       <p:sp>
         <p:nvSpPr>
-          <p:cNvPr id="30" name="Text 28"/>
-          <p:cNvSpPr/>
-          <p:nvPr/>
-        </p:nvSpPr>
-        <p:spPr>
-          <a:xfrm>
-            <a:off x="3200400" y="2807208"/>
-            <a:ext cx="2743200" cy="475488"/>
+          <p:cNvPr id="38" name="Text 36"/>
+          <p:cNvSpPr/>
+          <p:nvPr/>
+        </p:nvSpPr>
+        <p:spPr>
+          <a:xfrm>
+            <a:off x="3200400" y="4032504"/>
+            <a:ext cx="4389120" cy="566928"/>
           </a:xfrm>
           <a:prstGeom prst="rect">
             <a:avLst/>
@@ -17376,10 +17173,13 @@
           <a:lstStyle/>
           <a:p>
             <a:pPr algn="l" indent="0" marL="0">
-              <a:buNone/>
-            </a:pPr>
-            <a:r>
-              <a:rPr lang="en-US" sz="1000" dirty="0">
+              <a:lnSpc>
+                <a:spcPts val="1100"/>
+              </a:lnSpc>
+              <a:buNone/>
+            </a:pPr>
+            <a:r>
+              <a:rPr lang="en-US" sz="950" dirty="0">
                 <a:solidFill>
                   <a:srgbClr val="0B163C"/>
                 </a:solidFill>
@@ -17387,22 +17187,22 @@
                 <a:ea typeface="DM Sans" pitchFamily="34" charset="-122"/>
                 <a:cs typeface="DM Sans" pitchFamily="34" charset="-120"/>
               </a:rPr>
-              <a:t>65%</a:t>
-            </a:r>
-            <a:endParaRPr lang="en-US" sz="1000" dirty="0"/>
-          </a:p>
-        </p:txBody>
-      </p:sp>
-      <p:sp>
-        <p:nvSpPr>
-          <p:cNvPr id="31" name="Shape 29"/>
-          <p:cNvSpPr/>
-          <p:nvPr/>
-        </p:nvSpPr>
-        <p:spPr>
-          <a:xfrm>
-            <a:off x="5943600" y="2807208"/>
-            <a:ext cx="3017520" cy="475488"/>
+              <a:t>Regional homebuilders want entitled / finished lots</a:t>
+            </a:r>
+            <a:endParaRPr lang="en-US" sz="950" dirty="0"/>
+          </a:p>
+        </p:txBody>
+      </p:sp>
+      <p:sp>
+        <p:nvSpPr>
+          <p:cNvPr id="39" name="Shape 37"/>
+          <p:cNvSpPr/>
+          <p:nvPr/>
+        </p:nvSpPr>
+        <p:spPr>
+          <a:xfrm>
+            <a:off x="7589520" y="4032504"/>
+            <a:ext cx="4142232" cy="566928"/>
           </a:xfrm>
           <a:prstGeom prst="rect">
             <a:avLst/>
@@ -17415,14 +17215,14 @@
       </p:sp>
       <p:sp>
         <p:nvSpPr>
-          <p:cNvPr id="32" name="Text 30"/>
-          <p:cNvSpPr/>
-          <p:nvPr/>
-        </p:nvSpPr>
-        <p:spPr>
-          <a:xfrm>
-            <a:off x="5943600" y="2807208"/>
-            <a:ext cx="3017520" cy="475488"/>
+          <p:cNvPr id="40" name="Text 38"/>
+          <p:cNvSpPr/>
+          <p:nvPr/>
+        </p:nvSpPr>
+        <p:spPr>
+          <a:xfrm>
+            <a:off x="7589520" y="4032504"/>
+            <a:ext cx="4142232" cy="566928"/>
           </a:xfrm>
           <a:prstGeom prst="rect">
             <a:avLst/>
@@ -17435,10 +17235,13 @@
           <a:lstStyle/>
           <a:p>
             <a:pPr algn="l" indent="0" marL="0">
-              <a:buNone/>
-            </a:pPr>
-            <a:r>
-              <a:rPr lang="en-US" sz="900" dirty="0">
+              <a:lnSpc>
+                <a:spcPts val="1100"/>
+              </a:lnSpc>
+              <a:buNone/>
+            </a:pPr>
+            <a:r>
+              <a:rPr lang="en-US" sz="950" dirty="0">
                 <a:solidFill>
                   <a:srgbClr val="6B5A6B"/>
                 </a:solidFill>
@@ -17446,42 +17249,42 @@
                 <a:ea typeface="DM Sans" pitchFamily="34" charset="-122"/>
                 <a:cs typeface="DM Sans" pitchFamily="34" charset="-120"/>
               </a:rPr>
-              <a:t>120 × 365 × 0.65</a:t>
-            </a:r>
-            <a:endParaRPr lang="en-US" sz="900" dirty="0"/>
-          </a:p>
-        </p:txBody>
-      </p:sp>
-      <p:sp>
-        <p:nvSpPr>
-          <p:cNvPr id="33" name="Shape 31"/>
-          <p:cNvSpPr/>
-          <p:nvPr/>
-        </p:nvSpPr>
-        <p:spPr>
-          <a:xfrm>
-            <a:off x="8961120" y="2807208"/>
-            <a:ext cx="2743200" cy="475488"/>
-          </a:xfrm>
-          <a:prstGeom prst="rect">
-            <a:avLst/>
-          </a:prstGeom>
-          <a:solidFill>
-            <a:srgbClr val="F4F2ED"/>
-          </a:solidFill>
-          <a:ln/>
-        </p:spPr>
-      </p:sp>
-      <p:sp>
-        <p:nvSpPr>
-          <p:cNvPr id="34" name="Text 32"/>
-          <p:cNvSpPr/>
-          <p:nvPr/>
-        </p:nvSpPr>
-        <p:spPr>
-          <a:xfrm>
-            <a:off x="8961120" y="2807208"/>
-            <a:ext cx="2743200" cy="475488"/>
+              <a:t>They pay to avoid entitlement risk — and fund the infrastructure</a:t>
+            </a:r>
+            <a:endParaRPr lang="en-US" sz="950" dirty="0"/>
+          </a:p>
+        </p:txBody>
+      </p:sp>
+      <p:sp>
+        <p:nvSpPr>
+          <p:cNvPr id="41" name="Shape 39"/>
+          <p:cNvSpPr/>
+          <p:nvPr/>
+        </p:nvSpPr>
+        <p:spPr>
+          <a:xfrm>
+            <a:off x="457200" y="4599432"/>
+            <a:ext cx="2743200" cy="566928"/>
+          </a:xfrm>
+          <a:prstGeom prst="rect">
+            <a:avLst/>
+          </a:prstGeom>
+          <a:solidFill>
+            <a:srgbClr val="FFFFFF"/>
+          </a:solidFill>
+          <a:ln/>
+        </p:spPr>
+      </p:sp>
+      <p:sp>
+        <p:nvSpPr>
+          <p:cNvPr id="42" name="Text 40"/>
+          <p:cNvSpPr/>
+          <p:nvPr/>
+        </p:nvSpPr>
+        <p:spPr>
+          <a:xfrm>
+            <a:off x="457200" y="4599432"/>
+            <a:ext cx="2743200" cy="566928"/>
           </a:xfrm>
           <a:prstGeom prst="rect">
             <a:avLst/>
@@ -17493,34 +17296,34 @@
           <a:bodyPr wrap="square" lIns="25400" tIns="76200" rIns="76200" bIns="25400" rtlCol="0" anchor="ctr"/>
           <a:lstStyle/>
           <a:p>
-            <a:pPr algn="r" indent="0" marL="0">
-              <a:buNone/>
-            </a:pPr>
-            <a:r>
-              <a:rPr lang="en-US" sz="1100" b="1" dirty="0">
-                <a:solidFill>
-                  <a:srgbClr val="3A243A"/>
+            <a:pPr algn="l" indent="0" marL="0">
+              <a:buNone/>
+            </a:pPr>
+            <a:r>
+              <a:rPr lang="en-US" sz="1050" b="1" dirty="0">
+                <a:solidFill>
+                  <a:srgbClr val="0B163C"/>
                 </a:solidFill>
                 <a:latin typeface="Montserrat" pitchFamily="34" charset="0"/>
                 <a:ea typeface="Montserrat" pitchFamily="34" charset="-122"/>
                 <a:cs typeface="Montserrat" pitchFamily="34" charset="-120"/>
               </a:rPr>
-              <a:t>28,470 nights</a:t>
-            </a:r>
-            <a:endParaRPr lang="en-US" sz="1100" dirty="0"/>
-          </a:p>
-        </p:txBody>
-      </p:sp>
-      <p:sp>
-        <p:nvSpPr>
-          <p:cNvPr id="35" name="Shape 33"/>
-          <p:cNvSpPr/>
-          <p:nvPr/>
-        </p:nvSpPr>
-        <p:spPr>
-          <a:xfrm>
-            <a:off x="457200" y="3282696"/>
-            <a:ext cx="2743200" cy="475488"/>
+              <a:t>Owned land basis</a:t>
+            </a:r>
+            <a:endParaRPr lang="en-US" sz="1050" dirty="0"/>
+          </a:p>
+        </p:txBody>
+      </p:sp>
+      <p:sp>
+        <p:nvSpPr>
+          <p:cNvPr id="43" name="Shape 41"/>
+          <p:cNvSpPr/>
+          <p:nvPr/>
+        </p:nvSpPr>
+        <p:spPr>
+          <a:xfrm>
+            <a:off x="3200400" y="4599432"/>
+            <a:ext cx="4389120" cy="566928"/>
           </a:xfrm>
           <a:prstGeom prst="rect">
             <a:avLst/>
@@ -17533,14 +17336,14 @@
       </p:sp>
       <p:sp>
         <p:nvSpPr>
-          <p:cNvPr id="36" name="Text 34"/>
-          <p:cNvSpPr/>
-          <p:nvPr/>
-        </p:nvSpPr>
-        <p:spPr>
-          <a:xfrm>
-            <a:off x="457200" y="3282696"/>
-            <a:ext cx="2743200" cy="475488"/>
+          <p:cNvPr id="44" name="Text 42"/>
+          <p:cNvSpPr/>
+          <p:nvPr/>
+        </p:nvSpPr>
+        <p:spPr>
+          <a:xfrm>
+            <a:off x="3200400" y="4599432"/>
+            <a:ext cx="4389120" cy="566928"/>
           </a:xfrm>
           <a:prstGeom prst="rect">
             <a:avLst/>
@@ -17553,69 +17356,13 @@
           <a:lstStyle/>
           <a:p>
             <a:pPr algn="l" indent="0" marL="0">
-              <a:buNone/>
-            </a:pPr>
-            <a:r>
-              <a:rPr lang="en-US" sz="1000" b="1" dirty="0">
-                <a:solidFill>
-                  <a:srgbClr val="0B163C"/>
-                </a:solidFill>
-                <a:latin typeface="Montserrat" pitchFamily="34" charset="0"/>
-                <a:ea typeface="Montserrat" pitchFamily="34" charset="-122"/>
-                <a:cs typeface="Montserrat" pitchFamily="34" charset="-120"/>
-              </a:rPr>
-              <a:t>ADR</a:t>
-            </a:r>
-            <a:endParaRPr lang="en-US" sz="1000" dirty="0"/>
-          </a:p>
-        </p:txBody>
-      </p:sp>
-      <p:sp>
-        <p:nvSpPr>
-          <p:cNvPr id="37" name="Shape 35"/>
-          <p:cNvSpPr/>
-          <p:nvPr/>
-        </p:nvSpPr>
-        <p:spPr>
-          <a:xfrm>
-            <a:off x="3200400" y="3282696"/>
-            <a:ext cx="2743200" cy="475488"/>
-          </a:xfrm>
-          <a:prstGeom prst="rect">
-            <a:avLst/>
-          </a:prstGeom>
-          <a:solidFill>
-            <a:srgbClr val="FFFFFF"/>
-          </a:solidFill>
-          <a:ln/>
-        </p:spPr>
-      </p:sp>
-      <p:sp>
-        <p:nvSpPr>
-          <p:cNvPr id="38" name="Text 36"/>
-          <p:cNvSpPr/>
-          <p:nvPr/>
-        </p:nvSpPr>
-        <p:spPr>
-          <a:xfrm>
-            <a:off x="3200400" y="3282696"/>
-            <a:ext cx="2743200" cy="475488"/>
-          </a:xfrm>
-          <a:prstGeom prst="rect">
-            <a:avLst/>
-          </a:prstGeom>
-          <a:noFill/>
-          <a:ln/>
-        </p:spPr>
-        <p:txBody>
-          <a:bodyPr wrap="square" lIns="25400" tIns="76200" rIns="76200" bIns="25400" rtlCol="0" anchor="ctr"/>
-          <a:lstStyle/>
-          <a:p>
-            <a:pPr algn="l" indent="0" marL="0">
-              <a:buNone/>
-            </a:pPr>
-            <a:r>
-              <a:rPr lang="en-US" sz="1000" dirty="0">
+              <a:lnSpc>
+                <a:spcPts val="1100"/>
+              </a:lnSpc>
+              <a:buNone/>
+            </a:pPr>
+            <a:r>
+              <a:rPr lang="en-US" sz="950" dirty="0">
                 <a:solidFill>
                   <a:srgbClr val="0B163C"/>
                 </a:solidFill>
@@ -17623,22 +17370,22 @@
                 <a:ea typeface="DM Sans" pitchFamily="34" charset="-122"/>
                 <a:cs typeface="DM Sans" pitchFamily="34" charset="-120"/>
               </a:rPr>
-              <a:t>$185 / night</a:t>
-            </a:r>
-            <a:endParaRPr lang="en-US" sz="1000" dirty="0"/>
-          </a:p>
-        </p:txBody>
-      </p:sp>
-      <p:sp>
-        <p:nvSpPr>
-          <p:cNvPr id="39" name="Shape 37"/>
-          <p:cNvSpPr/>
-          <p:nvPr/>
-        </p:nvSpPr>
-        <p:spPr>
-          <a:xfrm>
-            <a:off x="5943600" y="3282696"/>
-            <a:ext cx="3017520" cy="475488"/>
+              <a:t>Acreage already on the balance sheet</a:t>
+            </a:r>
+            <a:endParaRPr lang="en-US" sz="950" dirty="0"/>
+          </a:p>
+        </p:txBody>
+      </p:sp>
+      <p:sp>
+        <p:nvSpPr>
+          <p:cNvPr id="45" name="Shape 43"/>
+          <p:cNvSpPr/>
+          <p:nvPr/>
+        </p:nvSpPr>
+        <p:spPr>
+          <a:xfrm>
+            <a:off x="7589520" y="4599432"/>
+            <a:ext cx="4142232" cy="566928"/>
           </a:xfrm>
           <a:prstGeom prst="rect">
             <a:avLst/>
@@ -17651,14 +17398,14 @@
       </p:sp>
       <p:sp>
         <p:nvSpPr>
-          <p:cNvPr id="40" name="Text 38"/>
-          <p:cNvSpPr/>
-          <p:nvPr/>
-        </p:nvSpPr>
-        <p:spPr>
-          <a:xfrm>
-            <a:off x="5943600" y="3282696"/>
-            <a:ext cx="3017520" cy="475488"/>
+          <p:cNvPr id="46" name="Text 44"/>
+          <p:cNvSpPr/>
+          <p:nvPr/>
+        </p:nvSpPr>
+        <p:spPr>
+          <a:xfrm>
+            <a:off x="7589520" y="4599432"/>
+            <a:ext cx="4142232" cy="566928"/>
           </a:xfrm>
           <a:prstGeom prst="rect">
             <a:avLst/>
@@ -17671,10 +17418,13 @@
           <a:lstStyle/>
           <a:p>
             <a:pPr algn="l" indent="0" marL="0">
-              <a:buNone/>
-            </a:pPr>
-            <a:r>
-              <a:rPr lang="en-US" sz="900" dirty="0">
+              <a:lnSpc>
+                <a:spcPts val="1100"/>
+              </a:lnSpc>
+              <a:buNone/>
+            </a:pPr>
+            <a:r>
+              <a:rPr lang="en-US" sz="950" dirty="0">
                 <a:solidFill>
                   <a:srgbClr val="6B5A6B"/>
                 </a:solidFill>
@@ -17682,824 +17432,68 @@
                 <a:ea typeface="DM Sans" pitchFamily="34" charset="-122"/>
                 <a:cs typeface="DM Sans" pitchFamily="34" charset="-120"/>
               </a:rPr>
-              <a:t>× $185</a:t>
-            </a:r>
-            <a:endParaRPr lang="en-US" sz="900" dirty="0"/>
-          </a:p>
-        </p:txBody>
-      </p:sp>
-      <p:sp>
-        <p:nvSpPr>
-          <p:cNvPr id="41" name="Shape 39"/>
-          <p:cNvSpPr/>
-          <p:nvPr/>
-        </p:nvSpPr>
-        <p:spPr>
-          <a:xfrm>
-            <a:off x="8961120" y="3282696"/>
-            <a:ext cx="2743200" cy="475488"/>
-          </a:xfrm>
-          <a:prstGeom prst="rect">
-            <a:avLst/>
-          </a:prstGeom>
-          <a:solidFill>
-            <a:srgbClr val="FFFFFF"/>
-          </a:solidFill>
-          <a:ln/>
-        </p:spPr>
-      </p:sp>
-      <p:sp>
-        <p:nvSpPr>
-          <p:cNvPr id="42" name="Text 40"/>
-          <p:cNvSpPr/>
-          <p:nvPr/>
-        </p:nvSpPr>
-        <p:spPr>
-          <a:xfrm>
-            <a:off x="8961120" y="3282696"/>
-            <a:ext cx="2743200" cy="475488"/>
-          </a:xfrm>
-          <a:prstGeom prst="rect">
-            <a:avLst/>
-          </a:prstGeom>
-          <a:noFill/>
-          <a:ln/>
-        </p:spPr>
-        <p:txBody>
-          <a:bodyPr wrap="square" lIns="25400" tIns="76200" rIns="76200" bIns="25400" rtlCol="0" anchor="ctr"/>
-          <a:lstStyle/>
-          <a:p>
-            <a:pPr algn="r" indent="0" marL="0">
+              <a:t>No land-acquisition cost to recover — margin starts higher</a:t>
+            </a:r>
+            <a:endParaRPr lang="en-US" sz="950" dirty="0"/>
+          </a:p>
+        </p:txBody>
+      </p:sp>
+      <p:sp>
+        <p:nvSpPr>
+          <p:cNvPr id="47" name="Shape 45"/>
+          <p:cNvSpPr/>
+          <p:nvPr/>
+        </p:nvSpPr>
+        <p:spPr>
+          <a:xfrm>
+            <a:off x="457200" y="5943600"/>
+            <a:ext cx="11274552" cy="420624"/>
+          </a:xfrm>
+          <a:prstGeom prst="rect">
+            <a:avLst/>
+          </a:prstGeom>
+          <a:solidFill>
+            <a:srgbClr val="3A243A"/>
+          </a:solidFill>
+          <a:ln/>
+        </p:spPr>
+      </p:sp>
+      <p:sp>
+        <p:nvSpPr>
+          <p:cNvPr id="48" name="Text 46"/>
+          <p:cNvSpPr/>
+          <p:nvPr/>
+        </p:nvSpPr>
+        <p:spPr>
+          <a:xfrm>
+            <a:off x="640080" y="5943600"/>
+            <a:ext cx="10908792" cy="420624"/>
+          </a:xfrm>
+          <a:prstGeom prst="rect">
+            <a:avLst/>
+          </a:prstGeom>
+          <a:noFill/>
+          <a:ln/>
+        </p:spPr>
+        <p:txBody>
+          <a:bodyPr wrap="square" lIns="0" tIns="0" rIns="0" bIns="0" rtlCol="0" anchor="ctr"/>
+          <a:lstStyle/>
+          <a:p>
+            <a:pPr algn="ctr" indent="0" marL="0">
               <a:buNone/>
             </a:pPr>
             <a:r>
               <a:rPr lang="en-US" sz="1100" b="1" dirty="0">
                 <a:solidFill>
-                  <a:srgbClr val="3A243A"/>
-                </a:solidFill>
-                <a:latin typeface="Montserrat" pitchFamily="34" charset="0"/>
-                <a:ea typeface="Montserrat" pitchFamily="34" charset="-122"/>
-                <a:cs typeface="Montserrat" pitchFamily="34" charset="-120"/>
-              </a:rPr>
-              <a:t>$5.27M rooms</a:t>
-            </a:r>
-            <a:endParaRPr lang="en-US" sz="1100" dirty="0"/>
-          </a:p>
-        </p:txBody>
-      </p:sp>
-      <p:sp>
-        <p:nvSpPr>
-          <p:cNvPr id="43" name="Shape 41"/>
-          <p:cNvSpPr/>
-          <p:nvPr/>
-        </p:nvSpPr>
-        <p:spPr>
-          <a:xfrm>
-            <a:off x="457200" y="3758184"/>
-            <a:ext cx="2743200" cy="475488"/>
-          </a:xfrm>
-          <a:prstGeom prst="rect">
-            <a:avLst/>
-          </a:prstGeom>
-          <a:solidFill>
-            <a:srgbClr val="F4F2ED"/>
-          </a:solidFill>
-          <a:ln/>
-        </p:spPr>
-      </p:sp>
-      <p:sp>
-        <p:nvSpPr>
-          <p:cNvPr id="44" name="Text 42"/>
-          <p:cNvSpPr/>
-          <p:nvPr/>
-        </p:nvSpPr>
-        <p:spPr>
-          <a:xfrm>
-            <a:off x="457200" y="3758184"/>
-            <a:ext cx="2743200" cy="475488"/>
-          </a:xfrm>
-          <a:prstGeom prst="rect">
-            <a:avLst/>
-          </a:prstGeom>
-          <a:noFill/>
-          <a:ln/>
-        </p:spPr>
-        <p:txBody>
-          <a:bodyPr wrap="square" lIns="25400" tIns="76200" rIns="76200" bIns="25400" rtlCol="0" anchor="ctr"/>
-          <a:lstStyle/>
-          <a:p>
-            <a:pPr algn="l" indent="0" marL="0">
-              <a:buNone/>
-            </a:pPr>
-            <a:r>
-              <a:rPr lang="en-US" sz="1000" b="1" dirty="0">
-                <a:solidFill>
-                  <a:srgbClr val="0B163C"/>
-                </a:solidFill>
-                <a:latin typeface="Montserrat" pitchFamily="34" charset="0"/>
-                <a:ea typeface="Montserrat" pitchFamily="34" charset="-122"/>
-                <a:cs typeface="Montserrat" pitchFamily="34" charset="-120"/>
-              </a:rPr>
-              <a:t>Total revenue incl. F&amp;B / events</a:t>
-            </a:r>
-            <a:endParaRPr lang="en-US" sz="1000" dirty="0"/>
-          </a:p>
-        </p:txBody>
-      </p:sp>
-      <p:sp>
-        <p:nvSpPr>
-          <p:cNvPr id="45" name="Shape 43"/>
-          <p:cNvSpPr/>
-          <p:nvPr/>
-        </p:nvSpPr>
-        <p:spPr>
-          <a:xfrm>
-            <a:off x="3200400" y="3758184"/>
-            <a:ext cx="2743200" cy="475488"/>
-          </a:xfrm>
-          <a:prstGeom prst="rect">
-            <a:avLst/>
-          </a:prstGeom>
-          <a:solidFill>
-            <a:srgbClr val="F4F2ED"/>
-          </a:solidFill>
-          <a:ln/>
-        </p:spPr>
-      </p:sp>
-      <p:sp>
-        <p:nvSpPr>
-          <p:cNvPr id="46" name="Text 44"/>
-          <p:cNvSpPr/>
-          <p:nvPr/>
-        </p:nvSpPr>
-        <p:spPr>
-          <a:xfrm>
-            <a:off x="3200400" y="3758184"/>
-            <a:ext cx="2743200" cy="475488"/>
-          </a:xfrm>
-          <a:prstGeom prst="rect">
-            <a:avLst/>
-          </a:prstGeom>
-          <a:noFill/>
-          <a:ln/>
-        </p:spPr>
-        <p:txBody>
-          <a:bodyPr wrap="square" lIns="25400" tIns="76200" rIns="76200" bIns="25400" rtlCol="0" anchor="ctr"/>
-          <a:lstStyle/>
-          <a:p>
-            <a:pPr algn="l" indent="0" marL="0">
-              <a:buNone/>
-            </a:pPr>
-            <a:r>
-              <a:rPr lang="en-US" sz="1000" dirty="0">
-                <a:solidFill>
-                  <a:srgbClr val="0B163C"/>
+                  <a:srgbClr val="FFFFFF"/>
                 </a:solidFill>
                 <a:latin typeface="DM Sans" pitchFamily="34" charset="0"/>
                 <a:ea typeface="DM Sans" pitchFamily="34" charset="-122"/>
                 <a:cs typeface="DM Sans" pitchFamily="34" charset="-120"/>
               </a:rPr>
-              <a:t>~1.4× room revenue</a:t>
-            </a:r>
-            <a:endParaRPr lang="en-US" sz="1000" dirty="0"/>
-          </a:p>
-        </p:txBody>
-      </p:sp>
-      <p:sp>
-        <p:nvSpPr>
-          <p:cNvPr id="47" name="Shape 45"/>
-          <p:cNvSpPr/>
-          <p:nvPr/>
-        </p:nvSpPr>
-        <p:spPr>
-          <a:xfrm>
-            <a:off x="5943600" y="3758184"/>
-            <a:ext cx="3017520" cy="475488"/>
-          </a:xfrm>
-          <a:prstGeom prst="rect">
-            <a:avLst/>
-          </a:prstGeom>
-          <a:solidFill>
-            <a:srgbClr val="F4F2ED"/>
-          </a:solidFill>
-          <a:ln/>
-        </p:spPr>
-      </p:sp>
-      <p:sp>
-        <p:nvSpPr>
-          <p:cNvPr id="48" name="Text 46"/>
-          <p:cNvSpPr/>
-          <p:nvPr/>
-        </p:nvSpPr>
-        <p:spPr>
-          <a:xfrm>
-            <a:off x="5943600" y="3758184"/>
-            <a:ext cx="3017520" cy="475488"/>
-          </a:xfrm>
-          <a:prstGeom prst="rect">
-            <a:avLst/>
-          </a:prstGeom>
-          <a:noFill/>
-          <a:ln/>
-        </p:spPr>
-        <p:txBody>
-          <a:bodyPr wrap="square" lIns="25400" tIns="76200" rIns="76200" bIns="25400" rtlCol="0" anchor="ctr"/>
-          <a:lstStyle/>
-          <a:p>
-            <a:pPr algn="l" indent="0" marL="0">
-              <a:buNone/>
-            </a:pPr>
-            <a:r>
-              <a:rPr lang="en-US" sz="900" dirty="0">
-                <a:solidFill>
-                  <a:srgbClr val="6B5A6B"/>
-                </a:solidFill>
-                <a:latin typeface="DM Sans" pitchFamily="34" charset="0"/>
-                <a:ea typeface="DM Sans" pitchFamily="34" charset="-122"/>
-                <a:cs typeface="DM Sans" pitchFamily="34" charset="-120"/>
-              </a:rPr>
-              <a:t>× 1.4</a:t>
-            </a:r>
-            <a:endParaRPr lang="en-US" sz="900" dirty="0"/>
-          </a:p>
-        </p:txBody>
-      </p:sp>
-      <p:sp>
-        <p:nvSpPr>
-          <p:cNvPr id="49" name="Shape 47"/>
-          <p:cNvSpPr/>
-          <p:nvPr/>
-        </p:nvSpPr>
-        <p:spPr>
-          <a:xfrm>
-            <a:off x="8961120" y="3758184"/>
-            <a:ext cx="2743200" cy="475488"/>
-          </a:xfrm>
-          <a:prstGeom prst="rect">
-            <a:avLst/>
-          </a:prstGeom>
-          <a:solidFill>
-            <a:srgbClr val="F4F2ED"/>
-          </a:solidFill>
-          <a:ln/>
-        </p:spPr>
-      </p:sp>
-      <p:sp>
-        <p:nvSpPr>
-          <p:cNvPr id="50" name="Text 48"/>
-          <p:cNvSpPr/>
-          <p:nvPr/>
-        </p:nvSpPr>
-        <p:spPr>
-          <a:xfrm>
-            <a:off x="8961120" y="3758184"/>
-            <a:ext cx="2743200" cy="475488"/>
-          </a:xfrm>
-          <a:prstGeom prst="rect">
-            <a:avLst/>
-          </a:prstGeom>
-          <a:noFill/>
-          <a:ln/>
-        </p:spPr>
-        <p:txBody>
-          <a:bodyPr wrap="square" lIns="25400" tIns="76200" rIns="76200" bIns="25400" rtlCol="0" anchor="ctr"/>
-          <a:lstStyle/>
-          <a:p>
-            <a:pPr algn="r" indent="0" marL="0">
-              <a:buNone/>
-            </a:pPr>
-            <a:r>
-              <a:rPr lang="en-US" sz="1100" b="1" dirty="0">
-                <a:solidFill>
-                  <a:srgbClr val="3A243A"/>
-                </a:solidFill>
-                <a:latin typeface="Montserrat" pitchFamily="34" charset="0"/>
-                <a:ea typeface="Montserrat" pitchFamily="34" charset="-122"/>
-                <a:cs typeface="Montserrat" pitchFamily="34" charset="-120"/>
-              </a:rPr>
-              <a:t>$7.4M gross</a:t>
+              <a:t>Demand is already here — we're entitling supply to meet it, not creating a market.</a:t>
             </a:r>
             <a:endParaRPr lang="en-US" sz="1100" dirty="0"/>
-          </a:p>
-        </p:txBody>
-      </p:sp>
-      <p:sp>
-        <p:nvSpPr>
-          <p:cNvPr id="51" name="Shape 49"/>
-          <p:cNvSpPr/>
-          <p:nvPr/>
-        </p:nvSpPr>
-        <p:spPr>
-          <a:xfrm>
-            <a:off x="457200" y="4233672"/>
-            <a:ext cx="2743200" cy="475488"/>
-          </a:xfrm>
-          <a:prstGeom prst="rect">
-            <a:avLst/>
-          </a:prstGeom>
-          <a:solidFill>
-            <a:srgbClr val="FFFFFF"/>
-          </a:solidFill>
-          <a:ln/>
-        </p:spPr>
-      </p:sp>
-      <p:sp>
-        <p:nvSpPr>
-          <p:cNvPr id="52" name="Text 50"/>
-          <p:cNvSpPr/>
-          <p:nvPr/>
-        </p:nvSpPr>
-        <p:spPr>
-          <a:xfrm>
-            <a:off x="457200" y="4233672"/>
-            <a:ext cx="2743200" cy="475488"/>
-          </a:xfrm>
-          <a:prstGeom prst="rect">
-            <a:avLst/>
-          </a:prstGeom>
-          <a:noFill/>
-          <a:ln/>
-        </p:spPr>
-        <p:txBody>
-          <a:bodyPr wrap="square" lIns="25400" tIns="76200" rIns="76200" bIns="25400" rtlCol="0" anchor="ctr"/>
-          <a:lstStyle/>
-          <a:p>
-            <a:pPr algn="l" indent="0" marL="0">
-              <a:buNone/>
-            </a:pPr>
-            <a:r>
-              <a:rPr lang="en-US" sz="1000" b="1" dirty="0">
-                <a:solidFill>
-                  <a:srgbClr val="0B163C"/>
-                </a:solidFill>
-                <a:latin typeface="Montserrat" pitchFamily="34" charset="0"/>
-                <a:ea typeface="Montserrat" pitchFamily="34" charset="-122"/>
-                <a:cs typeface="Montserrat" pitchFamily="34" charset="-120"/>
-              </a:rPr>
-              <a:t>Stabilized NOI margin</a:t>
-            </a:r>
-            <a:endParaRPr lang="en-US" sz="1000" dirty="0"/>
-          </a:p>
-        </p:txBody>
-      </p:sp>
-      <p:sp>
-        <p:nvSpPr>
-          <p:cNvPr id="53" name="Shape 51"/>
-          <p:cNvSpPr/>
-          <p:nvPr/>
-        </p:nvSpPr>
-        <p:spPr>
-          <a:xfrm>
-            <a:off x="3200400" y="4233672"/>
-            <a:ext cx="2743200" cy="475488"/>
-          </a:xfrm>
-          <a:prstGeom prst="rect">
-            <a:avLst/>
-          </a:prstGeom>
-          <a:solidFill>
-            <a:srgbClr val="FFFFFF"/>
-          </a:solidFill>
-          <a:ln/>
-        </p:spPr>
-      </p:sp>
-      <p:sp>
-        <p:nvSpPr>
-          <p:cNvPr id="54" name="Text 52"/>
-          <p:cNvSpPr/>
-          <p:nvPr/>
-        </p:nvSpPr>
-        <p:spPr>
-          <a:xfrm>
-            <a:off x="3200400" y="4233672"/>
-            <a:ext cx="2743200" cy="475488"/>
-          </a:xfrm>
-          <a:prstGeom prst="rect">
-            <a:avLst/>
-          </a:prstGeom>
-          <a:noFill/>
-          <a:ln/>
-        </p:spPr>
-        <p:txBody>
-          <a:bodyPr wrap="square" lIns="25400" tIns="76200" rIns="76200" bIns="25400" rtlCol="0" anchor="ctr"/>
-          <a:lstStyle/>
-          <a:p>
-            <a:pPr algn="l" indent="0" marL="0">
-              <a:buNone/>
-            </a:pPr>
-            <a:r>
-              <a:rPr lang="en-US" sz="1000" dirty="0">
-                <a:solidFill>
-                  <a:srgbClr val="0B163C"/>
-                </a:solidFill>
-                <a:latin typeface="DM Sans" pitchFamily="34" charset="0"/>
-                <a:ea typeface="DM Sans" pitchFamily="34" charset="-122"/>
-                <a:cs typeface="DM Sans" pitchFamily="34" charset="-120"/>
-              </a:rPr>
-              <a:t>~35%</a:t>
-            </a:r>
-            <a:endParaRPr lang="en-US" sz="1000" dirty="0"/>
-          </a:p>
-        </p:txBody>
-      </p:sp>
-      <p:sp>
-        <p:nvSpPr>
-          <p:cNvPr id="55" name="Shape 53"/>
-          <p:cNvSpPr/>
-          <p:nvPr/>
-        </p:nvSpPr>
-        <p:spPr>
-          <a:xfrm>
-            <a:off x="5943600" y="4233672"/>
-            <a:ext cx="3017520" cy="475488"/>
-          </a:xfrm>
-          <a:prstGeom prst="rect">
-            <a:avLst/>
-          </a:prstGeom>
-          <a:solidFill>
-            <a:srgbClr val="FFFFFF"/>
-          </a:solidFill>
-          <a:ln/>
-        </p:spPr>
-      </p:sp>
-      <p:sp>
-        <p:nvSpPr>
-          <p:cNvPr id="56" name="Text 54"/>
-          <p:cNvSpPr/>
-          <p:nvPr/>
-        </p:nvSpPr>
-        <p:spPr>
-          <a:xfrm>
-            <a:off x="5943600" y="4233672"/>
-            <a:ext cx="3017520" cy="475488"/>
-          </a:xfrm>
-          <a:prstGeom prst="rect">
-            <a:avLst/>
-          </a:prstGeom>
-          <a:noFill/>
-          <a:ln/>
-        </p:spPr>
-        <p:txBody>
-          <a:bodyPr wrap="square" lIns="25400" tIns="76200" rIns="76200" bIns="25400" rtlCol="0" anchor="ctr"/>
-          <a:lstStyle/>
-          <a:p>
-            <a:pPr algn="l" indent="0" marL="0">
-              <a:buNone/>
-            </a:pPr>
-            <a:r>
-              <a:rPr lang="en-US" sz="900" dirty="0">
-                <a:solidFill>
-                  <a:srgbClr val="6B5A6B"/>
-                </a:solidFill>
-                <a:latin typeface="DM Sans" pitchFamily="34" charset="0"/>
-                <a:ea typeface="DM Sans" pitchFamily="34" charset="-122"/>
-                <a:cs typeface="DM Sans" pitchFamily="34" charset="-120"/>
-              </a:rPr>
-              <a:t>× 0.35</a:t>
-            </a:r>
-            <a:endParaRPr lang="en-US" sz="900" dirty="0"/>
-          </a:p>
-        </p:txBody>
-      </p:sp>
-      <p:sp>
-        <p:nvSpPr>
-          <p:cNvPr id="57" name="Shape 55"/>
-          <p:cNvSpPr/>
-          <p:nvPr/>
-        </p:nvSpPr>
-        <p:spPr>
-          <a:xfrm>
-            <a:off x="8961120" y="4233672"/>
-            <a:ext cx="2743200" cy="475488"/>
-          </a:xfrm>
-          <a:prstGeom prst="rect">
-            <a:avLst/>
-          </a:prstGeom>
-          <a:solidFill>
-            <a:srgbClr val="FFFFFF"/>
-          </a:solidFill>
-          <a:ln/>
-        </p:spPr>
-      </p:sp>
-      <p:sp>
-        <p:nvSpPr>
-          <p:cNvPr id="58" name="Text 56"/>
-          <p:cNvSpPr/>
-          <p:nvPr/>
-        </p:nvSpPr>
-        <p:spPr>
-          <a:xfrm>
-            <a:off x="8961120" y="4233672"/>
-            <a:ext cx="2743200" cy="475488"/>
-          </a:xfrm>
-          <a:prstGeom prst="rect">
-            <a:avLst/>
-          </a:prstGeom>
-          <a:noFill/>
-          <a:ln/>
-        </p:spPr>
-        <p:txBody>
-          <a:bodyPr wrap="square" lIns="25400" tIns="76200" rIns="76200" bIns="25400" rtlCol="0" anchor="ctr"/>
-          <a:lstStyle/>
-          <a:p>
-            <a:pPr algn="r" indent="0" marL="0">
-              <a:buNone/>
-            </a:pPr>
-            <a:r>
-              <a:rPr lang="en-US" sz="1100" b="1" dirty="0">
-                <a:solidFill>
-                  <a:srgbClr val="3A243A"/>
-                </a:solidFill>
-                <a:latin typeface="Montserrat" pitchFamily="34" charset="0"/>
-                <a:ea typeface="Montserrat" pitchFamily="34" charset="-122"/>
-                <a:cs typeface="Montserrat" pitchFamily="34" charset="-120"/>
-              </a:rPr>
-              <a:t>$2.6M NOI</a:t>
-            </a:r>
-            <a:endParaRPr lang="en-US" sz="1100" dirty="0"/>
-          </a:p>
-        </p:txBody>
-      </p:sp>
-      <p:sp>
-        <p:nvSpPr>
-          <p:cNvPr id="59" name="Shape 57"/>
-          <p:cNvSpPr/>
-          <p:nvPr/>
-        </p:nvSpPr>
-        <p:spPr>
-          <a:xfrm>
-            <a:off x="457200" y="4709160"/>
-            <a:ext cx="2743200" cy="475488"/>
-          </a:xfrm>
-          <a:prstGeom prst="rect">
-            <a:avLst/>
-          </a:prstGeom>
-          <a:solidFill>
-            <a:srgbClr val="F4F2ED"/>
-          </a:solidFill>
-          <a:ln/>
-        </p:spPr>
-      </p:sp>
-      <p:sp>
-        <p:nvSpPr>
-          <p:cNvPr id="60" name="Text 58"/>
-          <p:cNvSpPr/>
-          <p:nvPr/>
-        </p:nvSpPr>
-        <p:spPr>
-          <a:xfrm>
-            <a:off x="457200" y="4709160"/>
-            <a:ext cx="2743200" cy="475488"/>
-          </a:xfrm>
-          <a:prstGeom prst="rect">
-            <a:avLst/>
-          </a:prstGeom>
-          <a:noFill/>
-          <a:ln/>
-        </p:spPr>
-        <p:txBody>
-          <a:bodyPr wrap="square" lIns="25400" tIns="76200" rIns="76200" bIns="25400" rtlCol="0" anchor="ctr"/>
-          <a:lstStyle/>
-          <a:p>
-            <a:pPr algn="l" indent="0" marL="0">
-              <a:buNone/>
-            </a:pPr>
-            <a:r>
-              <a:rPr lang="en-US" sz="1000" b="1" dirty="0">
-                <a:solidFill>
-                  <a:srgbClr val="0B163C"/>
-                </a:solidFill>
-                <a:latin typeface="Montserrat" pitchFamily="34" charset="0"/>
-                <a:ea typeface="Montserrat" pitchFamily="34" charset="-122"/>
-                <a:cs typeface="Montserrat" pitchFamily="34" charset="-120"/>
-              </a:rPr>
-              <a:t>VALUE AT 8.0% CAP</a:t>
-            </a:r>
-            <a:endParaRPr lang="en-US" sz="1000" dirty="0"/>
-          </a:p>
-        </p:txBody>
-      </p:sp>
-      <p:sp>
-        <p:nvSpPr>
-          <p:cNvPr id="61" name="Shape 59"/>
-          <p:cNvSpPr/>
-          <p:nvPr/>
-        </p:nvSpPr>
-        <p:spPr>
-          <a:xfrm>
-            <a:off x="3200400" y="4709160"/>
-            <a:ext cx="2743200" cy="475488"/>
-          </a:xfrm>
-          <a:prstGeom prst="rect">
-            <a:avLst/>
-          </a:prstGeom>
-          <a:solidFill>
-            <a:srgbClr val="F4F2ED"/>
-          </a:solidFill>
-          <a:ln/>
-        </p:spPr>
-      </p:sp>
-      <p:sp>
-        <p:nvSpPr>
-          <p:cNvPr id="62" name="Text 60"/>
-          <p:cNvSpPr/>
-          <p:nvPr/>
-        </p:nvSpPr>
-        <p:spPr>
-          <a:xfrm>
-            <a:off x="3200400" y="4709160"/>
-            <a:ext cx="2743200" cy="475488"/>
-          </a:xfrm>
-          <a:prstGeom prst="rect">
-            <a:avLst/>
-          </a:prstGeom>
-          <a:noFill/>
-          <a:ln/>
-        </p:spPr>
-        <p:txBody>
-          <a:bodyPr wrap="square" lIns="25400" tIns="76200" rIns="76200" bIns="25400" rtlCol="0" anchor="ctr"/>
-          <a:lstStyle/>
-          <a:p>
-            <a:pPr algn="l" indent="0" marL="0">
-              <a:buNone/>
-            </a:pPr>
-            <a:r>
-              <a:rPr lang="en-US" sz="1000" dirty="0">
-                <a:solidFill>
-                  <a:srgbClr val="6B5A6B"/>
-                </a:solidFill>
-                <a:latin typeface="DM Sans" pitchFamily="34" charset="0"/>
-                <a:ea typeface="DM Sans" pitchFamily="34" charset="-122"/>
-                <a:cs typeface="DM Sans" pitchFamily="34" charset="-120"/>
-              </a:rPr>
-              <a:t>$2.6M ÷ 0.08</a:t>
-            </a:r>
-            <a:endParaRPr lang="en-US" sz="1000" dirty="0"/>
-          </a:p>
-        </p:txBody>
-      </p:sp>
-      <p:sp>
-        <p:nvSpPr>
-          <p:cNvPr id="63" name="Shape 61"/>
-          <p:cNvSpPr/>
-          <p:nvPr/>
-        </p:nvSpPr>
-        <p:spPr>
-          <a:xfrm>
-            <a:off x="5943600" y="4709160"/>
-            <a:ext cx="3017520" cy="475488"/>
-          </a:xfrm>
-          <a:prstGeom prst="rect">
-            <a:avLst/>
-          </a:prstGeom>
-          <a:solidFill>
-            <a:srgbClr val="F4F2ED"/>
-          </a:solidFill>
-          <a:ln/>
-        </p:spPr>
-      </p:sp>
-      <p:sp>
-        <p:nvSpPr>
-          <p:cNvPr id="64" name="Text 62"/>
-          <p:cNvSpPr/>
-          <p:nvPr/>
-        </p:nvSpPr>
-        <p:spPr>
-          <a:xfrm>
-            <a:off x="5943600" y="4709160"/>
-            <a:ext cx="3017520" cy="475488"/>
-          </a:xfrm>
-          <a:prstGeom prst="rect">
-            <a:avLst/>
-          </a:prstGeom>
-          <a:noFill/>
-          <a:ln/>
-        </p:spPr>
-        <p:txBody>
-          <a:bodyPr wrap="square" lIns="25400" tIns="76200" rIns="76200" bIns="25400" rtlCol="0" anchor="ctr"/>
-          <a:lstStyle/>
-          <a:p>
-            <a:pPr algn="l" indent="0" marL="0">
-              <a:buNone/>
-            </a:pPr>
-            <a:endParaRPr lang="en-US" sz="900" dirty="0"/>
-          </a:p>
-        </p:txBody>
-      </p:sp>
-      <p:sp>
-        <p:nvSpPr>
-          <p:cNvPr id="65" name="Shape 63"/>
-          <p:cNvSpPr/>
-          <p:nvPr/>
-        </p:nvSpPr>
-        <p:spPr>
-          <a:xfrm>
-            <a:off x="8961120" y="4709160"/>
-            <a:ext cx="2743200" cy="475488"/>
-          </a:xfrm>
-          <a:prstGeom prst="rect">
-            <a:avLst/>
-          </a:prstGeom>
-          <a:solidFill>
-            <a:srgbClr val="F4F2ED"/>
-          </a:solidFill>
-          <a:ln/>
-        </p:spPr>
-      </p:sp>
-      <p:sp>
-        <p:nvSpPr>
-          <p:cNvPr id="66" name="Text 64"/>
-          <p:cNvSpPr/>
-          <p:nvPr/>
-        </p:nvSpPr>
-        <p:spPr>
-          <a:xfrm>
-            <a:off x="8961120" y="4709160"/>
-            <a:ext cx="2743200" cy="475488"/>
-          </a:xfrm>
-          <a:prstGeom prst="rect">
-            <a:avLst/>
-          </a:prstGeom>
-          <a:noFill/>
-          <a:ln/>
-        </p:spPr>
-        <p:txBody>
-          <a:bodyPr wrap="square" lIns="25400" tIns="76200" rIns="76200" bIns="25400" rtlCol="0" anchor="ctr"/>
-          <a:lstStyle/>
-          <a:p>
-            <a:pPr algn="r" indent="0" marL="0">
-              <a:buNone/>
-            </a:pPr>
-            <a:r>
-              <a:rPr lang="en-US" sz="1100" b="1" dirty="0">
-                <a:solidFill>
-                  <a:srgbClr val="3A243A"/>
-                </a:solidFill>
-                <a:latin typeface="Montserrat" pitchFamily="34" charset="0"/>
-                <a:ea typeface="Montserrat" pitchFamily="34" charset="-122"/>
-                <a:cs typeface="Montserrat" pitchFamily="34" charset="-120"/>
-              </a:rPr>
-              <a:t>≈ $32M</a:t>
-            </a:r>
-            <a:endParaRPr lang="en-US" sz="1100" dirty="0"/>
-          </a:p>
-        </p:txBody>
-      </p:sp>
-      <p:sp>
-        <p:nvSpPr>
-          <p:cNvPr id="67" name="Shape 65"/>
-          <p:cNvSpPr/>
-          <p:nvPr/>
-        </p:nvSpPr>
-        <p:spPr>
-          <a:xfrm>
-            <a:off x="457200" y="5166360"/>
-            <a:ext cx="11274552" cy="502920"/>
-          </a:xfrm>
-          <a:prstGeom prst="rect">
-            <a:avLst/>
-          </a:prstGeom>
-          <a:solidFill>
-            <a:srgbClr val="0B163C"/>
-          </a:solidFill>
-          <a:ln/>
-        </p:spPr>
-      </p:sp>
-      <p:sp>
-        <p:nvSpPr>
-          <p:cNvPr id="68" name="Text 66"/>
-          <p:cNvSpPr/>
-          <p:nvPr/>
-        </p:nvSpPr>
-        <p:spPr>
-          <a:xfrm>
-            <a:off x="640080" y="5166360"/>
-            <a:ext cx="10908792" cy="502920"/>
-          </a:xfrm>
-          <a:prstGeom prst="rect">
-            <a:avLst/>
-          </a:prstGeom>
-          <a:noFill/>
-          <a:ln/>
-        </p:spPr>
-        <p:txBody>
-          <a:bodyPr wrap="square" lIns="0" tIns="0" rIns="0" bIns="0" rtlCol="0" anchor="ctr"/>
-          <a:lstStyle/>
-          <a:p>
-            <a:pPr algn="ctr" indent="0" marL="0">
-              <a:buNone/>
-            </a:pPr>
-            <a:r>
-              <a:rPr lang="en-US" sz="1200" b="1" dirty="0">
-                <a:solidFill>
-                  <a:srgbClr val="FFFFFF"/>
-                </a:solidFill>
-                <a:latin typeface="Montserrat" pitchFamily="34" charset="0"/>
-                <a:ea typeface="Montserrat" pitchFamily="34" charset="-122"/>
-                <a:cs typeface="Montserrat" pitchFamily="34" charset="-120"/>
-              </a:rPr>
-              <a:t>≈ $2.6M incremental NOI ≈ $32M of value at an 8% cap — created from demand you already have.</a:t>
-            </a:r>
-            <a:endParaRPr lang="en-US" sz="1200" dirty="0"/>
           </a:p>
         </p:txBody>
       </p:sp>
@@ -18803,7 +17797,7 @@
                 <a:ea typeface="Montserrat" pitchFamily="34" charset="-122"/>
                 <a:cs typeface="Montserrat" pitchFamily="34" charset="-120"/>
               </a:rPr>
-              <a:t>Debt-led, land-as-equity, phased.</a:t>
+              <a:t>Capital-light by design.</a:t>
             </a:r>
             <a:endParaRPr lang="en-US" sz="2500" dirty="0"/>
           </a:p>
@@ -18845,7 +17839,7 @@
                 <a:ea typeface="DM Sans" pitchFamily="34" charset="-122"/>
                 <a:cs typeface="DM Sans" pitchFamily="34" charset="-120"/>
               </a:rPr>
-              <a:t>The land is the equity. Most of the program is financeable with debt and developer partners — the cash ask is modest and staged, not a single day-one check.</a:t>
+              <a:t>The land bank barely needs capital: soft costs to entitle, then builders fund the horizontal work and buy the lots. Cash in is small; proceeds come fast.</a:t>
             </a:r>
             <a:endParaRPr lang="en-US" sz="1300" dirty="0"/>
           </a:p>
@@ -18901,7 +17895,7 @@
               <a:buNone/>
             </a:pPr>
             <a:r>
-              <a:rPr lang="en-US" sz="1900" b="1" dirty="0">
+              <a:rPr lang="en-US" sz="2700" b="1" dirty="0">
                 <a:solidFill>
                   <a:srgbClr val="0B163C"/>
                 </a:solidFill>
@@ -18909,9 +17903,9 @@
                 <a:ea typeface="Montserrat" pitchFamily="34" charset="-122"/>
                 <a:cs typeface="Montserrat" pitchFamily="34" charset="-120"/>
               </a:rPr>
-              <a:t>Up to ~$100M</a:t>
-            </a:r>
-            <a:endParaRPr lang="en-US" sz="1900" dirty="0"/>
+              <a:t>$1–3M</a:t>
+            </a:r>
+            <a:endParaRPr lang="en-US" sz="2700" dirty="0"/>
           </a:p>
         </p:txBody>
       </p:sp>
@@ -18948,7 +17942,7 @@
                 <a:ea typeface="Montserrat" pitchFamily="34" charset="-122"/>
                 <a:cs typeface="Montserrat" pitchFamily="34" charset="-120"/>
               </a:rPr>
-              <a:t>Total program capacity</a:t>
+              <a:t>Soft costs to start</a:t>
             </a:r>
             <a:endParaRPr lang="en-US" sz="1200" dirty="0"/>
           </a:p>
@@ -18987,7 +17981,7 @@
                 <a:ea typeface="DM Sans" pitchFamily="34" charset="-122"/>
                 <a:cs typeface="DM Sans" pitchFamily="34" charset="-120"/>
               </a:rPr>
-              <a:t>Phased across the portfolio — not all at once</a:t>
+              <a:t>Entitlements, planning &amp; approvals</a:t>
             </a:r>
             <a:endParaRPr lang="en-US" sz="1000" dirty="0"/>
           </a:p>
@@ -19051,7 +18045,7 @@
                 <a:ea typeface="Montserrat" pitchFamily="34" charset="-122"/>
                 <a:cs typeface="Montserrat" pitchFamily="34" charset="-120"/>
               </a:rPr>
-              <a:t>76%+</a:t>
+              <a:t>Land</a:t>
             </a:r>
             <a:endParaRPr lang="en-US" sz="2700" dirty="0"/>
           </a:p>
@@ -19090,7 +18084,7 @@
                 <a:ea typeface="Montserrat" pitchFamily="34" charset="-122"/>
                 <a:cs typeface="Montserrat" pitchFamily="34" charset="-120"/>
               </a:rPr>
-              <a:t>Funded by land &amp; debt</a:t>
+              <a:t>= the equity</a:t>
             </a:r>
             <a:endParaRPr lang="en-US" sz="1200" dirty="0"/>
           </a:p>
@@ -19129,7 +18123,7 @@
                 <a:ea typeface="DM Sans" pitchFamily="34" charset="-122"/>
                 <a:cs typeface="DM Sans" pitchFamily="34" charset="-120"/>
               </a:rPr>
-              <a:t>Owned land contributed as equity; senior debt on top</a:t>
+              <a:t>Owned acreage carries the deal — no acquisition cost</a:t>
             </a:r>
             <a:endParaRPr lang="en-US" sz="1000" dirty="0"/>
           </a:p>
@@ -19247,7 +18241,7 @@
                 <a:ea typeface="Montserrat" pitchFamily="34" charset="-122"/>
                 <a:cs typeface="Montserrat" pitchFamily="34" charset="-120"/>
               </a:rPr>
-              <a:t>Use the balance sheet you already have.</a:t>
+              <a:t>You carry approvals, not construction.</a:t>
             </a:r>
             <a:endParaRPr lang="en-US" sz="1300" dirty="0"/>
           </a:p>
@@ -19289,7 +18283,7 @@
                 <a:ea typeface="DM Sans" pitchFamily="34" charset="-122"/>
                 <a:cs typeface="DM Sans" pitchFamily="34" charset="-120"/>
               </a:rPr>
-              <a:t>The land is the equity; debt and homebuilder takedowns do the heavy lifting. Cash equity stays small and staged — soft costs first, scale as the parcels prove out.</a:t>
+              <a:t>Builders take the infrastructure burden — sewer, roads, utilities — and pay for finished lots. Your cash at risk stays small and staged.</a:t>
             </a:r>
             <a:endParaRPr lang="en-US" sz="1050" dirty="0"/>
           </a:p>
@@ -19466,7 +18460,7 @@
                 <a:ea typeface="Montserrat" pitchFamily="34" charset="-122"/>
                 <a:cs typeface="Montserrat" pitchFamily="34" charset="-120"/>
               </a:rPr>
-              <a:t>Capital</a:t>
+              <a:t>Your capital</a:t>
             </a:r>
             <a:endParaRPr lang="en-US" sz="900" dirty="0"/>
           </a:p>
@@ -19481,7 +18475,7 @@
         <p:spPr>
           <a:xfrm>
             <a:off x="8229600" y="3931920"/>
-            <a:ext cx="3474720" cy="365760"/>
+            <a:ext cx="3502152" cy="365760"/>
           </a:xfrm>
           <a:prstGeom prst="rect">
             <a:avLst/>
@@ -19501,7 +18495,7 @@
         <p:spPr>
           <a:xfrm>
             <a:off x="8229600" y="3931920"/>
-            <a:ext cx="3474720" cy="365760"/>
+            <a:ext cx="3502152" cy="365760"/>
           </a:xfrm>
           <a:prstGeom prst="rect">
             <a:avLst/>
@@ -19525,7 +18519,7 @@
                 <a:ea typeface="Montserrat" pitchFamily="34" charset="-122"/>
                 <a:cs typeface="Montserrat" pitchFamily="34" charset="-120"/>
               </a:rPr>
-              <a:t>Source</a:t>
+              <a:t>Who funds</a:t>
             </a:r>
             <a:endParaRPr lang="en-US" sz="900" dirty="0"/>
           </a:p>
@@ -19540,7 +18534,7 @@
         <p:spPr>
           <a:xfrm>
             <a:off x="457200" y="4297680"/>
-            <a:ext cx="2743200" cy="420624"/>
+            <a:ext cx="2743200" cy="457200"/>
           </a:xfrm>
           <a:prstGeom prst="rect">
             <a:avLst/>
@@ -19560,7 +18554,7 @@
         <p:spPr>
           <a:xfrm>
             <a:off x="457200" y="4297680"/>
-            <a:ext cx="2743200" cy="420624"/>
+            <a:ext cx="2743200" cy="457200"/>
           </a:xfrm>
           <a:prstGeom prst="rect">
             <a:avLst/>
@@ -19584,7 +18578,7 @@
                 <a:ea typeface="Montserrat" pitchFamily="34" charset="-122"/>
                 <a:cs typeface="Montserrat" pitchFamily="34" charset="-120"/>
               </a:rPr>
-              <a:t>Phase 1 — Entitlements</a:t>
+              <a:t>Phase 1 — Entitle</a:t>
             </a:r>
             <a:endParaRPr lang="en-US" sz="1000" dirty="0"/>
           </a:p>
@@ -19599,7 +18593,7 @@
         <p:spPr>
           <a:xfrm>
             <a:off x="3200400" y="4297680"/>
-            <a:ext cx="3017520" cy="420624"/>
+            <a:ext cx="3017520" cy="457200"/>
           </a:xfrm>
           <a:prstGeom prst="rect">
             <a:avLst/>
@@ -19619,7 +18613,7 @@
         <p:spPr>
           <a:xfrm>
             <a:off x="3200400" y="4297680"/>
-            <a:ext cx="3017520" cy="420624"/>
+            <a:ext cx="3017520" cy="457200"/>
           </a:xfrm>
           <a:prstGeom prst="rect">
             <a:avLst/>
@@ -19643,7 +18637,7 @@
                 <a:ea typeface="DM Sans" pitchFamily="34" charset="-122"/>
                 <a:cs typeface="DM Sans" pitchFamily="34" charset="-120"/>
               </a:rPr>
-              <a:t>Soft costs only</a:t>
+              <a:t>Approvals for lots</a:t>
             </a:r>
             <a:endParaRPr lang="en-US" sz="950" dirty="0"/>
           </a:p>
@@ -19658,7 +18652,7 @@
         <p:spPr>
           <a:xfrm>
             <a:off x="6217920" y="4297680"/>
-            <a:ext cx="2011680" cy="420624"/>
+            <a:ext cx="2011680" cy="457200"/>
           </a:xfrm>
           <a:prstGeom prst="rect">
             <a:avLst/>
@@ -19678,7 +18672,7 @@
         <p:spPr>
           <a:xfrm>
             <a:off x="6217920" y="4297680"/>
-            <a:ext cx="2011680" cy="420624"/>
+            <a:ext cx="2011680" cy="457200"/>
           </a:xfrm>
           <a:prstGeom prst="rect">
             <a:avLst/>
@@ -19717,7 +18711,7 @@
         <p:spPr>
           <a:xfrm>
             <a:off x="8229600" y="4297680"/>
-            <a:ext cx="3474720" cy="420624"/>
+            <a:ext cx="3502152" cy="457200"/>
           </a:xfrm>
           <a:prstGeom prst="rect">
             <a:avLst/>
@@ -19737,7 +18731,7 @@
         <p:spPr>
           <a:xfrm>
             <a:off x="8229600" y="4297680"/>
-            <a:ext cx="3474720" cy="420624"/>
+            <a:ext cx="3502152" cy="457200"/>
           </a:xfrm>
           <a:prstGeom prst="rect">
             <a:avLst/>
@@ -19775,8 +18769,8 @@
         </p:nvSpPr>
         <p:spPr>
           <a:xfrm>
-            <a:off x="457200" y="4718304"/>
-            <a:ext cx="2743200" cy="420624"/>
+            <a:off x="457200" y="4754880"/>
+            <a:ext cx="2743200" cy="457200"/>
           </a:xfrm>
           <a:prstGeom prst="rect">
             <a:avLst/>
@@ -19795,8 +18789,8 @@
         </p:nvSpPr>
         <p:spPr>
           <a:xfrm>
-            <a:off x="457200" y="4718304"/>
-            <a:ext cx="2743200" cy="420624"/>
+            <a:off x="457200" y="4754880"/>
+            <a:ext cx="2743200" cy="457200"/>
           </a:xfrm>
           <a:prstGeom prst="rect">
             <a:avLst/>
@@ -19820,7 +18814,7 @@
                 <a:ea typeface="Montserrat" pitchFamily="34" charset="-122"/>
                 <a:cs typeface="Montserrat" pitchFamily="34" charset="-120"/>
               </a:rPr>
-              <a:t>Phase 2 — Lot development</a:t>
+              <a:t>Phase 2 — Builder takedown</a:t>
             </a:r>
             <a:endParaRPr lang="en-US" sz="1000" dirty="0"/>
           </a:p>
@@ -19834,8 +18828,8 @@
         </p:nvSpPr>
         <p:spPr>
           <a:xfrm>
-            <a:off x="3200400" y="4718304"/>
-            <a:ext cx="3017520" cy="420624"/>
+            <a:off x="3200400" y="4754880"/>
+            <a:ext cx="3017520" cy="457200"/>
           </a:xfrm>
           <a:prstGeom prst="rect">
             <a:avLst/>
@@ -19854,8 +18848,8 @@
         </p:nvSpPr>
         <p:spPr>
           <a:xfrm>
-            <a:off x="3200400" y="4718304"/>
-            <a:ext cx="3017520" cy="420624"/>
+            <a:off x="3200400" y="4754880"/>
+            <a:ext cx="3017520" cy="457200"/>
           </a:xfrm>
           <a:prstGeom prst="rect">
             <a:avLst/>
@@ -19879,7 +18873,7 @@
                 <a:ea typeface="DM Sans" pitchFamily="34" charset="-122"/>
                 <a:cs typeface="DM Sans" pitchFamily="34" charset="-120"/>
               </a:rPr>
-              <a:t>Builder-funded horizontal</a:t>
+              <a:t>Horizontal + lot purchase</a:t>
             </a:r>
             <a:endParaRPr lang="en-US" sz="950" dirty="0"/>
           </a:p>
@@ -19893,8 +18887,8 @@
         </p:nvSpPr>
         <p:spPr>
           <a:xfrm>
-            <a:off x="6217920" y="4718304"/>
-            <a:ext cx="2011680" cy="420624"/>
+            <a:off x="6217920" y="4754880"/>
+            <a:ext cx="2011680" cy="457200"/>
           </a:xfrm>
           <a:prstGeom prst="rect">
             <a:avLst/>
@@ -19913,8 +18907,8 @@
         </p:nvSpPr>
         <p:spPr>
           <a:xfrm>
-            <a:off x="6217920" y="4718304"/>
-            <a:ext cx="2011680" cy="420624"/>
+            <a:off x="6217920" y="4754880"/>
+            <a:ext cx="2011680" cy="457200"/>
           </a:xfrm>
           <a:prstGeom prst="rect">
             <a:avLst/>
@@ -19938,7 +18932,7 @@
                 <a:ea typeface="Montserrat" pitchFamily="34" charset="-122"/>
                 <a:cs typeface="Montserrat" pitchFamily="34" charset="-120"/>
               </a:rPr>
-              <a:t>~$0</a:t>
+              <a:t>~$0 to you</a:t>
             </a:r>
             <a:endParaRPr lang="en-US" sz="1000" dirty="0"/>
           </a:p>
@@ -19952,8 +18946,8 @@
         </p:nvSpPr>
         <p:spPr>
           <a:xfrm>
-            <a:off x="8229600" y="4718304"/>
-            <a:ext cx="3474720" cy="420624"/>
+            <a:off x="8229600" y="4754880"/>
+            <a:ext cx="3502152" cy="457200"/>
           </a:xfrm>
           <a:prstGeom prst="rect">
             <a:avLst/>
@@ -19972,8 +18966,8 @@
         </p:nvSpPr>
         <p:spPr>
           <a:xfrm>
-            <a:off x="8229600" y="4718304"/>
-            <a:ext cx="3474720" cy="420624"/>
+            <a:off x="8229600" y="4754880"/>
+            <a:ext cx="3502152" cy="457200"/>
           </a:xfrm>
           <a:prstGeom prst="rect">
             <a:avLst/>
@@ -19997,7 +18991,7 @@
                 <a:ea typeface="DM Sans" pitchFamily="34" charset="-122"/>
                 <a:cs typeface="DM Sans" pitchFamily="34" charset="-120"/>
               </a:rPr>
-              <a:t>Homebuilder takedown</a:t>
+              <a:t>Regional homebuilder funds &amp; buys</a:t>
             </a:r>
             <a:endParaRPr lang="en-US" sz="900" dirty="0"/>
           </a:p>
@@ -20011,8 +19005,8 @@
         </p:nvSpPr>
         <p:spPr>
           <a:xfrm>
-            <a:off x="457200" y="5138928"/>
-            <a:ext cx="2743200" cy="420624"/>
+            <a:off x="457200" y="5212080"/>
+            <a:ext cx="2743200" cy="457200"/>
           </a:xfrm>
           <a:prstGeom prst="rect">
             <a:avLst/>
@@ -20031,8 +19025,8 @@
         </p:nvSpPr>
         <p:spPr>
           <a:xfrm>
-            <a:off x="457200" y="5138928"/>
-            <a:ext cx="2743200" cy="420624"/>
+            <a:off x="457200" y="5212080"/>
+            <a:ext cx="2743200" cy="457200"/>
           </a:xfrm>
           <a:prstGeom prst="rect">
             <a:avLst/>
@@ -20056,7 +19050,7 @@
                 <a:ea typeface="Montserrat" pitchFamily="34" charset="-122"/>
                 <a:cs typeface="Montserrat" pitchFamily="34" charset="-120"/>
               </a:rPr>
-              <a:t>Phase 3 — Hospitality keys</a:t>
+              <a:t>Phase 3 — Recycle</a:t>
             </a:r>
             <a:endParaRPr lang="en-US" sz="1000" dirty="0"/>
           </a:p>
@@ -20070,8 +19064,8 @@
         </p:nvSpPr>
         <p:spPr>
           <a:xfrm>
-            <a:off x="3200400" y="5138928"/>
-            <a:ext cx="3017520" cy="420624"/>
+            <a:off x="3200400" y="5212080"/>
+            <a:ext cx="3017520" cy="457200"/>
           </a:xfrm>
           <a:prstGeom prst="rect">
             <a:avLst/>
@@ -20090,8 +19084,8 @@
         </p:nvSpPr>
         <p:spPr>
           <a:xfrm>
-            <a:off x="3200400" y="5138928"/>
-            <a:ext cx="3017520" cy="420624"/>
+            <a:off x="3200400" y="5212080"/>
+            <a:ext cx="3017520" cy="457200"/>
           </a:xfrm>
           <a:prstGeom prst="rect">
             <a:avLst/>
@@ -20115,7 +19109,7 @@
                 <a:ea typeface="DM Sans" pitchFamily="34" charset="-122"/>
                 <a:cs typeface="DM Sans" pitchFamily="34" charset="-120"/>
               </a:rPr>
-              <a:t>Construction debt + equity</a:t>
+              <a:t>Proceeds redeployed</a:t>
             </a:r>
             <a:endParaRPr lang="en-US" sz="950" dirty="0"/>
           </a:p>
@@ -20129,8 +19123,8 @@
         </p:nvSpPr>
         <p:spPr>
           <a:xfrm>
-            <a:off x="6217920" y="5138928"/>
-            <a:ext cx="2011680" cy="420624"/>
+            <a:off x="6217920" y="5212080"/>
+            <a:ext cx="2011680" cy="457200"/>
           </a:xfrm>
           <a:prstGeom prst="rect">
             <a:avLst/>
@@ -20149,8 +19143,8 @@
         </p:nvSpPr>
         <p:spPr>
           <a:xfrm>
-            <a:off x="6217920" y="5138928"/>
-            <a:ext cx="2011680" cy="420624"/>
+            <a:off x="6217920" y="5212080"/>
+            <a:ext cx="2011680" cy="457200"/>
           </a:xfrm>
           <a:prstGeom prst="rect">
             <a:avLst/>
@@ -20174,7 +19168,7 @@
                 <a:ea typeface="Montserrat" pitchFamily="34" charset="-122"/>
                 <a:cs typeface="Montserrat" pitchFamily="34" charset="-120"/>
               </a:rPr>
-              <a:t>$30–60M</a:t>
+              <a:t>Self-funding</a:t>
             </a:r>
             <a:endParaRPr lang="en-US" sz="1000" dirty="0"/>
           </a:p>
@@ -20188,8 +19182,8 @@
         </p:nvSpPr>
         <p:spPr>
           <a:xfrm>
-            <a:off x="8229600" y="5138928"/>
-            <a:ext cx="3474720" cy="420624"/>
+            <a:off x="8229600" y="5212080"/>
+            <a:ext cx="3502152" cy="457200"/>
           </a:xfrm>
           <a:prstGeom prst="rect">
             <a:avLst/>
@@ -20208,8 +19202,8 @@
         </p:nvSpPr>
         <p:spPr>
           <a:xfrm>
-            <a:off x="8229600" y="5138928"/>
-            <a:ext cx="3474720" cy="420624"/>
+            <a:off x="8229600" y="5212080"/>
+            <a:ext cx="3502152" cy="457200"/>
           </a:xfrm>
           <a:prstGeom prst="rect">
             <a:avLst/>
@@ -20233,7 +19227,7 @@
                 <a:ea typeface="DM Sans" pitchFamily="34" charset="-122"/>
                 <a:cs typeface="DM Sans" pitchFamily="34" charset="-120"/>
               </a:rPr>
-              <a:t>Hospitality lender + family-office equity</a:t>
+              <a:t>Next course / broader AE program</a:t>
             </a:r>
             <a:endParaRPr lang="en-US" sz="900" dirty="0"/>
           </a:p>
@@ -20247,14 +19241,14 @@
         </p:nvSpPr>
         <p:spPr>
           <a:xfrm>
-            <a:off x="457200" y="5559552"/>
-            <a:ext cx="2743200" cy="420624"/>
-          </a:xfrm>
-          <a:prstGeom prst="rect">
-            <a:avLst/>
-          </a:prstGeom>
-          <a:solidFill>
-            <a:srgbClr val="F4F2ED"/>
+            <a:off x="457200" y="5943600"/>
+            <a:ext cx="11274552" cy="420624"/>
+          </a:xfrm>
+          <a:prstGeom prst="rect">
+            <a:avLst/>
+          </a:prstGeom>
+          <a:solidFill>
+            <a:srgbClr val="3A243A"/>
           </a:solidFill>
           <a:ln/>
         </p:spPr>
@@ -20267,268 +19261,32 @@
         </p:nvSpPr>
         <p:spPr>
           <a:xfrm>
-            <a:off x="457200" y="5559552"/>
-            <a:ext cx="2743200" cy="420624"/>
-          </a:xfrm>
-          <a:prstGeom prst="rect">
-            <a:avLst/>
-          </a:prstGeom>
-          <a:noFill/>
-          <a:ln/>
-        </p:spPr>
-        <p:txBody>
-          <a:bodyPr wrap="square" lIns="25400" tIns="76200" rIns="76200" bIns="25400" rtlCol="0" anchor="ctr"/>
-          <a:lstStyle/>
-          <a:p>
-            <a:pPr algn="l" indent="0" marL="0">
-              <a:buNone/>
-            </a:pPr>
-            <a:r>
-              <a:rPr lang="en-US" sz="1000" b="1" dirty="0">
-                <a:solidFill>
-                  <a:srgbClr val="0B163C"/>
-                </a:solidFill>
-                <a:latin typeface="Montserrat" pitchFamily="34" charset="0"/>
-                <a:ea typeface="Montserrat" pitchFamily="34" charset="-122"/>
-                <a:cs typeface="Montserrat" pitchFamily="34" charset="-120"/>
-              </a:rPr>
-              <a:t>Portfolio — Recycle</a:t>
-            </a:r>
-            <a:endParaRPr lang="en-US" sz="1000" dirty="0"/>
-          </a:p>
-        </p:txBody>
-      </p:sp>
-      <p:sp>
-        <p:nvSpPr>
-          <p:cNvPr id="58" name="Shape 56"/>
-          <p:cNvSpPr/>
-          <p:nvPr/>
-        </p:nvSpPr>
-        <p:spPr>
-          <a:xfrm>
-            <a:off x="3200400" y="5559552"/>
-            <a:ext cx="3017520" cy="420624"/>
-          </a:xfrm>
-          <a:prstGeom prst="rect">
-            <a:avLst/>
-          </a:prstGeom>
-          <a:solidFill>
-            <a:srgbClr val="F4F2ED"/>
-          </a:solidFill>
-          <a:ln/>
-        </p:spPr>
-      </p:sp>
-      <p:sp>
-        <p:nvSpPr>
-          <p:cNvPr id="59" name="Text 57"/>
-          <p:cNvSpPr/>
-          <p:nvPr/>
-        </p:nvSpPr>
-        <p:spPr>
-          <a:xfrm>
-            <a:off x="3200400" y="5559552"/>
-            <a:ext cx="3017520" cy="420624"/>
-          </a:xfrm>
-          <a:prstGeom prst="rect">
-            <a:avLst/>
-          </a:prstGeom>
-          <a:noFill/>
-          <a:ln/>
-        </p:spPr>
-        <p:txBody>
-          <a:bodyPr wrap="square" lIns="25400" tIns="76200" rIns="76200" bIns="25400" rtlCol="0" anchor="ctr"/>
-          <a:lstStyle/>
-          <a:p>
-            <a:pPr algn="l" indent="0" marL="0">
-              <a:buNone/>
-            </a:pPr>
-            <a:r>
-              <a:rPr lang="en-US" sz="950" dirty="0">
-                <a:solidFill>
-                  <a:srgbClr val="0B163C"/>
+            <a:off x="640080" y="5943600"/>
+            <a:ext cx="10908792" cy="420624"/>
+          </a:xfrm>
+          <a:prstGeom prst="rect">
+            <a:avLst/>
+          </a:prstGeom>
+          <a:noFill/>
+          <a:ln/>
+        </p:spPr>
+        <p:txBody>
+          <a:bodyPr wrap="square" lIns="0" tIns="0" rIns="0" bIns="0" rtlCol="0" anchor="ctr"/>
+          <a:lstStyle/>
+          <a:p>
+            <a:pPr algn="ctr" indent="0" marL="0">
+              <a:buNone/>
+            </a:pPr>
+            <a:r>
+              <a:rPr lang="en-US" sz="1100" b="1" dirty="0">
+                <a:solidFill>
+                  <a:srgbClr val="FFFFFF"/>
                 </a:solidFill>
                 <a:latin typeface="DM Sans" pitchFamily="34" charset="0"/>
                 <a:ea typeface="DM Sans" pitchFamily="34" charset="-122"/>
                 <a:cs typeface="DM Sans" pitchFamily="34" charset="-120"/>
               </a:rPr>
-              <a:t>Proceeds + refinancing</a:t>
-            </a:r>
-            <a:endParaRPr lang="en-US" sz="950" dirty="0"/>
-          </a:p>
-        </p:txBody>
-      </p:sp>
-      <p:sp>
-        <p:nvSpPr>
-          <p:cNvPr id="60" name="Shape 58"/>
-          <p:cNvSpPr/>
-          <p:nvPr/>
-        </p:nvSpPr>
-        <p:spPr>
-          <a:xfrm>
-            <a:off x="6217920" y="5559552"/>
-            <a:ext cx="2011680" cy="420624"/>
-          </a:xfrm>
-          <a:prstGeom prst="rect">
-            <a:avLst/>
-          </a:prstGeom>
-          <a:solidFill>
-            <a:srgbClr val="F4F2ED"/>
-          </a:solidFill>
-          <a:ln/>
-        </p:spPr>
-      </p:sp>
-      <p:sp>
-        <p:nvSpPr>
-          <p:cNvPr id="61" name="Text 59"/>
-          <p:cNvSpPr/>
-          <p:nvPr/>
-        </p:nvSpPr>
-        <p:spPr>
-          <a:xfrm>
-            <a:off x="6217920" y="5559552"/>
-            <a:ext cx="2011680" cy="420624"/>
-          </a:xfrm>
-          <a:prstGeom prst="rect">
-            <a:avLst/>
-          </a:prstGeom>
-          <a:noFill/>
-          <a:ln/>
-        </p:spPr>
-        <p:txBody>
-          <a:bodyPr wrap="square" lIns="25400" tIns="76200" rIns="76200" bIns="25400" rtlCol="0" anchor="ctr"/>
-          <a:lstStyle/>
-          <a:p>
-            <a:pPr algn="ctr" indent="0" marL="0">
-              <a:buNone/>
-            </a:pPr>
-            <a:r>
-              <a:rPr lang="en-US" sz="1000" b="1" dirty="0">
-                <a:solidFill>
-                  <a:srgbClr val="3A243A"/>
-                </a:solidFill>
-                <a:latin typeface="Montserrat" pitchFamily="34" charset="0"/>
-                <a:ea typeface="Montserrat" pitchFamily="34" charset="-122"/>
-                <a:cs typeface="Montserrat" pitchFamily="34" charset="-120"/>
-              </a:rPr>
-              <a:t>Self-funding</a:t>
-            </a:r>
-            <a:endParaRPr lang="en-US" sz="1000" dirty="0"/>
-          </a:p>
-        </p:txBody>
-      </p:sp>
-      <p:sp>
-        <p:nvSpPr>
-          <p:cNvPr id="62" name="Shape 60"/>
-          <p:cNvSpPr/>
-          <p:nvPr/>
-        </p:nvSpPr>
-        <p:spPr>
-          <a:xfrm>
-            <a:off x="8229600" y="5559552"/>
-            <a:ext cx="3474720" cy="420624"/>
-          </a:xfrm>
-          <a:prstGeom prst="rect">
-            <a:avLst/>
-          </a:prstGeom>
-          <a:solidFill>
-            <a:srgbClr val="F4F2ED"/>
-          </a:solidFill>
-          <a:ln/>
-        </p:spPr>
-      </p:sp>
-      <p:sp>
-        <p:nvSpPr>
-          <p:cNvPr id="63" name="Text 61"/>
-          <p:cNvSpPr/>
-          <p:nvPr/>
-        </p:nvSpPr>
-        <p:spPr>
-          <a:xfrm>
-            <a:off x="8229600" y="5559552"/>
-            <a:ext cx="3474720" cy="420624"/>
-          </a:xfrm>
-          <a:prstGeom prst="rect">
-            <a:avLst/>
-          </a:prstGeom>
-          <a:noFill/>
-          <a:ln/>
-        </p:spPr>
-        <p:txBody>
-          <a:bodyPr wrap="square" lIns="25400" tIns="76200" rIns="76200" bIns="25400" rtlCol="0" anchor="ctr"/>
-          <a:lstStyle/>
-          <a:p>
-            <a:pPr algn="l" indent="0" marL="0">
-              <a:buNone/>
-            </a:pPr>
-            <a:r>
-              <a:rPr lang="en-US" sz="900" dirty="0">
-                <a:solidFill>
-                  <a:srgbClr val="6B5A6B"/>
-                </a:solidFill>
-                <a:latin typeface="DM Sans" pitchFamily="34" charset="0"/>
-                <a:ea typeface="DM Sans" pitchFamily="34" charset="-122"/>
-                <a:cs typeface="DM Sans" pitchFamily="34" charset="-120"/>
-              </a:rPr>
-              <a:t>Roll forward into next parcel</a:t>
-            </a:r>
-            <a:endParaRPr lang="en-US" sz="900" dirty="0"/>
-          </a:p>
-        </p:txBody>
-      </p:sp>
-      <p:sp>
-        <p:nvSpPr>
-          <p:cNvPr id="64" name="Shape 62"/>
-          <p:cNvSpPr/>
-          <p:nvPr/>
-        </p:nvSpPr>
-        <p:spPr>
-          <a:xfrm>
-            <a:off x="457200" y="5943600"/>
-            <a:ext cx="11274552" cy="420624"/>
-          </a:xfrm>
-          <a:prstGeom prst="rect">
-            <a:avLst/>
-          </a:prstGeom>
-          <a:solidFill>
-            <a:srgbClr val="3A243A"/>
-          </a:solidFill>
-          <a:ln/>
-        </p:spPr>
-      </p:sp>
-      <p:sp>
-        <p:nvSpPr>
-          <p:cNvPr id="65" name="Text 63"/>
-          <p:cNvSpPr/>
-          <p:nvPr/>
-        </p:nvSpPr>
-        <p:spPr>
-          <a:xfrm>
-            <a:off x="640080" y="5943600"/>
-            <a:ext cx="10908792" cy="420624"/>
-          </a:xfrm>
-          <a:prstGeom prst="rect">
-            <a:avLst/>
-          </a:prstGeom>
-          <a:noFill/>
-          <a:ln/>
-        </p:spPr>
-        <p:txBody>
-          <a:bodyPr wrap="square" lIns="0" tIns="0" rIns="0" bIns="0" rtlCol="0" anchor="ctr"/>
-          <a:lstStyle/>
-          <a:p>
-            <a:pPr algn="ctr" indent="0" marL="0">
-              <a:buNone/>
-            </a:pPr>
-            <a:r>
-              <a:rPr lang="en-US" sz="1100" b="1" dirty="0">
-                <a:solidFill>
-                  <a:srgbClr val="FFFFFF"/>
-                </a:solidFill>
-                <a:latin typeface="DM Sans" pitchFamily="34" charset="0"/>
-                <a:ea typeface="DM Sans" pitchFamily="34" charset="-122"/>
-                <a:cs typeface="DM Sans" pitchFamily="34" charset="-120"/>
-              </a:rPr>
-              <a:t>Start capital-light: a $1–3M soft-cost raise funds entitlements and first lot sales — proof before the big check.</a:t>
+              <a:t>Minimal capital at risk — and the land bank seeds everything that comes after.</a:t>
             </a:r>
             <a:endParaRPr lang="en-US" sz="1100" dirty="0"/>
           </a:p>
@@ -20876,7 +19634,7 @@
                 <a:ea typeface="DM Sans" pitchFamily="34" charset="-122"/>
                 <a:cs typeface="DM Sans" pitchFamily="34" charset="-120"/>
               </a:rPr>
-              <a:t>Active mandates, not a paper Rolodex — debt and equity, on call. Here's what's moving right now and who I place with.</a:t>
+              <a:t>When a parcel does call for equity or debt — or to move faster — here's the access. Active mandates, not a paper Rolodex.</a:t>
             </a:r>
             <a:endParaRPr lang="en-US" sz="1300" dirty="0"/>
           </a:p>
@@ -21691,7 +20449,7 @@
                 <a:ea typeface="DM Sans" pitchFamily="34" charset="-122"/>
                 <a:cs typeface="DM Sans" pitchFamily="34" charset="-120"/>
               </a:rPr>
-              <a:t>National debt — Goldman Sachs (met two weeks ago; national platform, Dallas team) + hospitality credit lenders.</a:t>
+              <a:t>National debt — Goldman Sachs (met two weeks ago; national platform, Dallas team) + specialty lenders.</a:t>
             </a:r>
             <a:endParaRPr lang="en-US" sz="1000" dirty="0"/>
           </a:p>
